--- a/slides/3-10_gamma_calculation/3-10_gamma_calculation.pptx
+++ b/slides/3-10_gamma_calculation/3-10_gamma_calculation.pptx
@@ -2309,7 +2309,7 @@
           </a:xfrm>
           <a:prstGeom prst="roundRect">
             <a:avLst>
-              <a:gd name="adj" fmla="val 15625"/>
+              <a:gd name="adj" fmla="val 7813"/>
             </a:avLst>
           </a:prstGeom>
           <a:solidFill>
@@ -2318,14 +2318,14 @@
           <a:ln/>
         </p:spPr>
         <p:txBody>
-          <a:bodyPr wrap="square" lIns="0" tIns="0" rIns="0" bIns="0" rtlCol="0" anchor="ctr"/>
+          <a:bodyPr wrap="none" lIns="0" tIns="0" rIns="0" bIns="0" rtlCol="0" anchor="ctr"/>
           <a:lstStyle/>
           <a:p>
             <a:pPr algn="ctr" indent="0" marL="0">
               <a:buNone/>
             </a:pPr>
             <a:r>
-              <a:rPr lang="ja-JP" altLang="en-US" sz="1100" dirty="0">
+              <a:rPr lang="ja-JP" altLang="en-US" sz="1050" dirty="0">
                 <a:solidFill>
                   <a:srgbClr val="404040"/>
                 </a:solidFill>
@@ -2335,7 +2335,7 @@
               </a:rPr>
               <a:t>定義</a:t>
             </a:r>
-            <a:endParaRPr lang="ja-JP" sz="1100" dirty="0"/>
+            <a:endParaRPr lang="ja-JP" sz="1050" dirty="0"/>
           </a:p>
         </p:txBody>
       </p:sp>
@@ -2352,7 +2352,7 @@
           </a:xfrm>
           <a:prstGeom prst="roundRect">
             <a:avLst>
-              <a:gd name="adj" fmla="val 15625"/>
+              <a:gd name="adj" fmla="val 7813"/>
             </a:avLst>
           </a:prstGeom>
           <a:solidFill>
@@ -2361,14 +2361,14 @@
           <a:ln/>
         </p:spPr>
         <p:txBody>
-          <a:bodyPr wrap="square" lIns="0" tIns="0" rIns="0" bIns="0" rtlCol="0" anchor="ctr"/>
+          <a:bodyPr wrap="none" lIns="0" tIns="0" rIns="0" bIns="0" rtlCol="0" anchor="ctr"/>
           <a:lstStyle/>
           <a:p>
             <a:pPr algn="ctr" indent="0" marL="0">
               <a:buNone/>
             </a:pPr>
             <a:r>
-              <a:rPr lang="ja-JP" altLang="en-US" sz="1100" dirty="0">
+              <a:rPr lang="ja-JP" altLang="en-US" sz="1050" dirty="0">
                 <a:solidFill>
                   <a:srgbClr val="404040"/>
                 </a:solidFill>
@@ -2378,7 +2378,7 @@
               </a:rPr>
               <a:t>式</a:t>
             </a:r>
-            <a:endParaRPr lang="ja-JP" sz="1100" dirty="0"/>
+            <a:endParaRPr lang="ja-JP" sz="1050" dirty="0"/>
           </a:p>
         </p:txBody>
       </p:sp>
@@ -2395,7 +2395,7 @@
           </a:xfrm>
           <a:prstGeom prst="roundRect">
             <a:avLst>
-              <a:gd name="adj" fmla="val 15625"/>
+              <a:gd name="adj" fmla="val 7813"/>
             </a:avLst>
           </a:prstGeom>
           <a:solidFill>
@@ -2404,14 +2404,14 @@
           <a:ln/>
         </p:spPr>
         <p:txBody>
-          <a:bodyPr wrap="square" lIns="0" tIns="0" rIns="0" bIns="0" rtlCol="0" anchor="ctr"/>
+          <a:bodyPr wrap="none" lIns="0" tIns="0" rIns="0" bIns="0" rtlCol="0" anchor="ctr"/>
           <a:lstStyle/>
           <a:p>
             <a:pPr algn="ctr" indent="0" marL="0">
               <a:buNone/>
             </a:pPr>
             <a:r>
-              <a:rPr lang="ja-JP" altLang="en-US" sz="1100" dirty="0">
+              <a:rPr lang="ja-JP" altLang="en-US" sz="1050" dirty="0">
                 <a:solidFill>
                   <a:srgbClr val="404040"/>
                 </a:solidFill>
@@ -2421,7 +2421,7 @@
               </a:rPr>
               <a:t>演習</a:t>
             </a:r>
-            <a:endParaRPr lang="ja-JP" sz="1100" dirty="0"/>
+            <a:endParaRPr lang="ja-JP" sz="1050" dirty="0"/>
           </a:p>
         </p:txBody>
       </p:sp>
@@ -2438,7 +2438,7 @@
           </a:xfrm>
           <a:prstGeom prst="roundRect">
             <a:avLst>
-              <a:gd name="adj" fmla="val 15625"/>
+              <a:gd name="adj" fmla="val 7813"/>
             </a:avLst>
           </a:prstGeom>
           <a:solidFill>
@@ -2447,14 +2447,14 @@
           <a:ln/>
         </p:spPr>
         <p:txBody>
-          <a:bodyPr wrap="square" lIns="0" tIns="0" rIns="0" bIns="0" rtlCol="0" anchor="ctr"/>
+          <a:bodyPr wrap="none" lIns="0" tIns="0" rIns="0" bIns="0" rtlCol="0" anchor="ctr"/>
           <a:lstStyle/>
           <a:p>
             <a:pPr algn="ctr" indent="0" marL="0">
               <a:buNone/>
             </a:pPr>
             <a:r>
-              <a:rPr lang="ja-JP" altLang="en-US" sz="1100" dirty="0">
+              <a:rPr lang="ja-JP" altLang="en-US" sz="1050" dirty="0">
                 <a:solidFill>
                   <a:srgbClr val="404040"/>
                 </a:solidFill>
@@ -2464,7 +2464,7 @@
               </a:rPr>
               <a:t>検算</a:t>
             </a:r>
-            <a:endParaRPr lang="ja-JP" sz="1100" dirty="0"/>
+            <a:endParaRPr lang="ja-JP" sz="1050" dirty="0"/>
           </a:p>
         </p:txBody>
       </p:sp>
@@ -2481,7 +2481,7 @@
           </a:xfrm>
           <a:prstGeom prst="roundRect">
             <a:avLst>
-              <a:gd name="adj" fmla="val 15625"/>
+              <a:gd name="adj" fmla="val 7813"/>
             </a:avLst>
           </a:prstGeom>
           <a:solidFill>
@@ -2490,14 +2490,14 @@
           <a:ln/>
         </p:spPr>
         <p:txBody>
-          <a:bodyPr wrap="square" lIns="0" tIns="0" rIns="0" bIns="0" rtlCol="0" anchor="ctr"/>
+          <a:bodyPr wrap="none" lIns="0" tIns="0" rIns="0" bIns="0" rtlCol="0" anchor="ctr"/>
           <a:lstStyle/>
           <a:p>
             <a:pPr algn="ctr" indent="0" marL="0">
               <a:buNone/>
             </a:pPr>
             <a:r>
-              <a:rPr lang="ja-JP" altLang="en-US" sz="1100" b="1" dirty="0">
+              <a:rPr lang="ja-JP" altLang="en-US" sz="1050" b="1" dirty="0">
                 <a:solidFill>
                   <a:srgbClr val="FFFFFF"/>
                 </a:solidFill>
@@ -2507,7 +2507,7 @@
               </a:rPr>
               <a:t>落とし穴</a:t>
             </a:r>
-            <a:endParaRPr lang="ja-JP" sz="1100" dirty="0"/>
+            <a:endParaRPr lang="ja-JP" sz="1050" dirty="0"/>
           </a:p>
         </p:txBody>
       </p:sp>
@@ -2614,8 +2614,8 @@
         </p:nvSpPr>
         <p:spPr>
           <a:xfrm>
-            <a:off x="502920" y="1810512"/>
-            <a:ext cx="11155680" cy="3685032"/>
+            <a:off x="502920" y="1828800"/>
+            <a:ext cx="11155680" cy="3813048"/>
           </a:xfrm>
           <a:prstGeom prst="rect">
             <a:avLst/>
@@ -2629,12 +2629,23 @@
           <a:p>
             <a:pPr algn="l" marL="406400" indent="-406400">
               <a:spcAft>
-                <a:spcPts val="2000"/>
+                <a:spcPts val="2200"/>
               </a:spcAft>
               <a:buSzPct val="100000"/>
               <a:buChar char="•"/>
             </a:pPr>
             <a:r>
+              <a:rPr lang="ja-JP" altLang="en-US" sz="2800" b="1" dirty="0">
+                <a:solidFill>
+                  <a:srgbClr val="262626"/>
+                </a:solidFill>
+                <a:latin typeface="メイリオ" pitchFamily="34" charset="0"/>
+                <a:ea typeface="メイリオ" pitchFamily="34" charset="-122"/>
+                <a:cs typeface="メイリオ" pitchFamily="34" charset="-120"/>
+              </a:rPr>
+              <a:t>mg と μg</a:t>
+            </a:r>
+            <a:r>
               <a:rPr lang="ja-JP" altLang="en-US" sz="2800" dirty="0">
                 <a:solidFill>
                   <a:srgbClr val="262626"/>
@@ -2643,7 +2654,7 @@
                 <a:ea typeface="メイリオ" pitchFamily="34" charset="-122"/>
                 <a:cs typeface="メイリオ" pitchFamily="34" charset="-120"/>
               </a:rPr>
-              <a:t>mg と μg（</a:t>
+              <a:t>（</a:t>
             </a:r>
             <a:r>
               <a:rPr lang="ja-JP" altLang="en-US" sz="2800" b="1" dirty="0">
@@ -2665,7 +2676,29 @@
                 <a:ea typeface="メイリオ" pitchFamily="34" charset="-122"/>
                 <a:cs typeface="メイリオ" pitchFamily="34" charset="-120"/>
               </a:rPr>
-              <a:t>）、分と時（</a:t>
+              <a:t>）、</a:t>
+            </a:r>
+            <a:r>
+              <a:rPr lang="ja-JP" altLang="en-US" sz="2800" b="1" dirty="0">
+                <a:solidFill>
+                  <a:srgbClr val="262626"/>
+                </a:solidFill>
+                <a:latin typeface="メイリオ" pitchFamily="34" charset="0"/>
+                <a:ea typeface="メイリオ" pitchFamily="34" charset="-122"/>
+                <a:cs typeface="メイリオ" pitchFamily="34" charset="-120"/>
+              </a:rPr>
+              <a:t>分と時</a:t>
+            </a:r>
+            <a:r>
+              <a:rPr lang="ja-JP" altLang="en-US" sz="2800" dirty="0">
+                <a:solidFill>
+                  <a:srgbClr val="262626"/>
+                </a:solidFill>
+                <a:latin typeface="メイリオ" pitchFamily="34" charset="0"/>
+                <a:ea typeface="メイリオ" pitchFamily="34" charset="-122"/>
+                <a:cs typeface="メイリオ" pitchFamily="34" charset="-120"/>
+              </a:rPr>
+              <a:t>（</a:t>
             </a:r>
             <a:r>
               <a:rPr lang="ja-JP" altLang="en-US" sz="2800" b="1" dirty="0">
@@ -2694,7 +2727,7 @@
           <a:p>
             <a:pPr algn="l" marL="406400" indent="-406400">
               <a:spcAft>
-                <a:spcPts val="2000"/>
+                <a:spcPts val="2200"/>
               </a:spcAft>
               <a:buSzPct val="100000"/>
               <a:buChar char="•"/>
@@ -2726,7 +2759,7 @@
           <a:p>
             <a:pPr algn="l" marL="406400" indent="-406400">
               <a:spcAft>
-                <a:spcPts val="2000"/>
+                <a:spcPts val="2200"/>
               </a:spcAft>
               <a:buSzPct val="100000"/>
               <a:buChar char="•"/>
@@ -2758,7 +2791,7 @@
           <a:p>
             <a:pPr algn="l" marL="406400" indent="-406400">
               <a:spcAft>
-                <a:spcPts val="2000"/>
+                <a:spcPts val="2200"/>
               </a:spcAft>
               <a:buSzPct val="100000"/>
               <a:buChar char="•"/>
@@ -2790,7 +2823,7 @@
           <a:p>
             <a:pPr algn="l" marL="406400" indent="-406400">
               <a:spcAft>
-                <a:spcPts val="2000"/>
+                <a:spcPts val="2200"/>
               </a:spcAft>
               <a:buSzPct val="100000"/>
               <a:buChar char="•"/>
@@ -2930,7 +2963,7 @@
           </a:xfrm>
           <a:prstGeom prst="roundRect">
             <a:avLst>
-              <a:gd name="adj" fmla="val 15625"/>
+              <a:gd name="adj" fmla="val 7813"/>
             </a:avLst>
           </a:prstGeom>
           <a:solidFill>
@@ -2939,14 +2972,14 @@
           <a:ln/>
         </p:spPr>
         <p:txBody>
-          <a:bodyPr wrap="square" lIns="0" tIns="0" rIns="0" bIns="0" rtlCol="0" anchor="ctr"/>
+          <a:bodyPr wrap="none" lIns="0" tIns="0" rIns="0" bIns="0" rtlCol="0" anchor="ctr"/>
           <a:lstStyle/>
           <a:p>
             <a:pPr algn="ctr" indent="0" marL="0">
               <a:buNone/>
             </a:pPr>
             <a:r>
-              <a:rPr lang="ja-JP" altLang="en-US" sz="1100" dirty="0">
+              <a:rPr lang="ja-JP" altLang="en-US" sz="1050" dirty="0">
                 <a:solidFill>
                   <a:srgbClr val="404040"/>
                 </a:solidFill>
@@ -2956,7 +2989,7 @@
               </a:rPr>
               <a:t>定義</a:t>
             </a:r>
-            <a:endParaRPr lang="ja-JP" sz="1100" dirty="0"/>
+            <a:endParaRPr lang="ja-JP" sz="1050" dirty="0"/>
           </a:p>
         </p:txBody>
       </p:sp>
@@ -2973,7 +3006,7 @@
           </a:xfrm>
           <a:prstGeom prst="roundRect">
             <a:avLst>
-              <a:gd name="adj" fmla="val 15625"/>
+              <a:gd name="adj" fmla="val 7813"/>
             </a:avLst>
           </a:prstGeom>
           <a:solidFill>
@@ -2982,14 +3015,14 @@
           <a:ln/>
         </p:spPr>
         <p:txBody>
-          <a:bodyPr wrap="square" lIns="0" tIns="0" rIns="0" bIns="0" rtlCol="0" anchor="ctr"/>
+          <a:bodyPr wrap="none" lIns="0" tIns="0" rIns="0" bIns="0" rtlCol="0" anchor="ctr"/>
           <a:lstStyle/>
           <a:p>
             <a:pPr algn="ctr" indent="0" marL="0">
               <a:buNone/>
             </a:pPr>
             <a:r>
-              <a:rPr lang="ja-JP" altLang="en-US" sz="1100" dirty="0">
+              <a:rPr lang="ja-JP" altLang="en-US" sz="1050" dirty="0">
                 <a:solidFill>
                   <a:srgbClr val="404040"/>
                 </a:solidFill>
@@ -2999,7 +3032,7 @@
               </a:rPr>
               <a:t>式</a:t>
             </a:r>
-            <a:endParaRPr lang="ja-JP" sz="1100" dirty="0"/>
+            <a:endParaRPr lang="ja-JP" sz="1050" dirty="0"/>
           </a:p>
         </p:txBody>
       </p:sp>
@@ -3016,7 +3049,7 @@
           </a:xfrm>
           <a:prstGeom prst="roundRect">
             <a:avLst>
-              <a:gd name="adj" fmla="val 15625"/>
+              <a:gd name="adj" fmla="val 7813"/>
             </a:avLst>
           </a:prstGeom>
           <a:solidFill>
@@ -3025,14 +3058,14 @@
           <a:ln/>
         </p:spPr>
         <p:txBody>
-          <a:bodyPr wrap="square" lIns="0" tIns="0" rIns="0" bIns="0" rtlCol="0" anchor="ctr"/>
+          <a:bodyPr wrap="none" lIns="0" tIns="0" rIns="0" bIns="0" rtlCol="0" anchor="ctr"/>
           <a:lstStyle/>
           <a:p>
             <a:pPr algn="ctr" indent="0" marL="0">
               <a:buNone/>
             </a:pPr>
             <a:r>
-              <a:rPr lang="ja-JP" altLang="en-US" sz="1100" dirty="0">
+              <a:rPr lang="ja-JP" altLang="en-US" sz="1050" dirty="0">
                 <a:solidFill>
                   <a:srgbClr val="404040"/>
                 </a:solidFill>
@@ -3042,7 +3075,7 @@
               </a:rPr>
               <a:t>演習</a:t>
             </a:r>
-            <a:endParaRPr lang="ja-JP" sz="1100" dirty="0"/>
+            <a:endParaRPr lang="ja-JP" sz="1050" dirty="0"/>
           </a:p>
         </p:txBody>
       </p:sp>
@@ -3059,7 +3092,7 @@
           </a:xfrm>
           <a:prstGeom prst="roundRect">
             <a:avLst>
-              <a:gd name="adj" fmla="val 15625"/>
+              <a:gd name="adj" fmla="val 7813"/>
             </a:avLst>
           </a:prstGeom>
           <a:solidFill>
@@ -3068,14 +3101,14 @@
           <a:ln/>
         </p:spPr>
         <p:txBody>
-          <a:bodyPr wrap="square" lIns="0" tIns="0" rIns="0" bIns="0" rtlCol="0" anchor="ctr"/>
+          <a:bodyPr wrap="none" lIns="0" tIns="0" rIns="0" bIns="0" rtlCol="0" anchor="ctr"/>
           <a:lstStyle/>
           <a:p>
             <a:pPr algn="ctr" indent="0" marL="0">
               <a:buNone/>
             </a:pPr>
             <a:r>
-              <a:rPr lang="ja-JP" altLang="en-US" sz="1100" dirty="0">
+              <a:rPr lang="ja-JP" altLang="en-US" sz="1050" dirty="0">
                 <a:solidFill>
                   <a:srgbClr val="404040"/>
                 </a:solidFill>
@@ -3085,7 +3118,7 @@
               </a:rPr>
               <a:t>検算</a:t>
             </a:r>
-            <a:endParaRPr lang="ja-JP" sz="1100" dirty="0"/>
+            <a:endParaRPr lang="ja-JP" sz="1050" dirty="0"/>
           </a:p>
         </p:txBody>
       </p:sp>
@@ -3102,7 +3135,7 @@
           </a:xfrm>
           <a:prstGeom prst="roundRect">
             <a:avLst>
-              <a:gd name="adj" fmla="val 15625"/>
+              <a:gd name="adj" fmla="val 7813"/>
             </a:avLst>
           </a:prstGeom>
           <a:solidFill>
@@ -3111,14 +3144,14 @@
           <a:ln/>
         </p:spPr>
         <p:txBody>
-          <a:bodyPr wrap="square" lIns="0" tIns="0" rIns="0" bIns="0" rtlCol="0" anchor="ctr"/>
+          <a:bodyPr wrap="none" lIns="0" tIns="0" rIns="0" bIns="0" rtlCol="0" anchor="ctr"/>
           <a:lstStyle/>
           <a:p>
             <a:pPr algn="ctr" indent="0" marL="0">
               <a:buNone/>
             </a:pPr>
             <a:r>
-              <a:rPr lang="ja-JP" altLang="en-US" sz="1100" b="1" dirty="0">
+              <a:rPr lang="ja-JP" altLang="en-US" sz="1050" b="1" dirty="0">
                 <a:solidFill>
                   <a:srgbClr val="FFFFFF"/>
                 </a:solidFill>
@@ -3128,7 +3161,7 @@
               </a:rPr>
               <a:t>落とし穴</a:t>
             </a:r>
-            <a:endParaRPr lang="ja-JP" sz="1100" dirty="0"/>
+            <a:endParaRPr lang="ja-JP" sz="1050" dirty="0"/>
           </a:p>
         </p:txBody>
       </p:sp>
@@ -3446,7 +3479,7 @@
           </a:xfrm>
           <a:prstGeom prst="roundRect">
             <a:avLst>
-              <a:gd name="adj" fmla="val 15625"/>
+              <a:gd name="adj" fmla="val 7813"/>
             </a:avLst>
           </a:prstGeom>
           <a:solidFill>
@@ -3455,14 +3488,14 @@
           <a:ln/>
         </p:spPr>
         <p:txBody>
-          <a:bodyPr wrap="square" lIns="0" tIns="0" rIns="0" bIns="0" rtlCol="0" anchor="ctr"/>
+          <a:bodyPr wrap="none" lIns="0" tIns="0" rIns="0" bIns="0" rtlCol="0" anchor="ctr"/>
           <a:lstStyle/>
           <a:p>
             <a:pPr algn="ctr" indent="0" marL="0">
               <a:buNone/>
             </a:pPr>
             <a:r>
-              <a:rPr lang="ja-JP" altLang="en-US" sz="1100" b="1" dirty="0">
+              <a:rPr lang="ja-JP" altLang="en-US" sz="1050" b="1" dirty="0">
                 <a:solidFill>
                   <a:srgbClr val="FFFFFF"/>
                 </a:solidFill>
@@ -3472,7 +3505,7 @@
               </a:rPr>
               <a:t>定義</a:t>
             </a:r>
-            <a:endParaRPr lang="ja-JP" sz="1100" dirty="0"/>
+            <a:endParaRPr lang="ja-JP" sz="1050" dirty="0"/>
           </a:p>
         </p:txBody>
       </p:sp>
@@ -3489,7 +3522,7 @@
           </a:xfrm>
           <a:prstGeom prst="roundRect">
             <a:avLst>
-              <a:gd name="adj" fmla="val 15625"/>
+              <a:gd name="adj" fmla="val 7813"/>
             </a:avLst>
           </a:prstGeom>
           <a:solidFill>
@@ -3498,14 +3531,14 @@
           <a:ln/>
         </p:spPr>
         <p:txBody>
-          <a:bodyPr wrap="square" lIns="0" tIns="0" rIns="0" bIns="0" rtlCol="0" anchor="ctr"/>
+          <a:bodyPr wrap="none" lIns="0" tIns="0" rIns="0" bIns="0" rtlCol="0" anchor="ctr"/>
           <a:lstStyle/>
           <a:p>
             <a:pPr algn="ctr" indent="0" marL="0">
               <a:buNone/>
             </a:pPr>
             <a:r>
-              <a:rPr lang="ja-JP" altLang="en-US" sz="1100" dirty="0">
+              <a:rPr lang="ja-JP" altLang="en-US" sz="1050" dirty="0">
                 <a:solidFill>
                   <a:srgbClr val="404040"/>
                 </a:solidFill>
@@ -3515,7 +3548,7 @@
               </a:rPr>
               <a:t>式</a:t>
             </a:r>
-            <a:endParaRPr lang="ja-JP" sz="1100" dirty="0"/>
+            <a:endParaRPr lang="ja-JP" sz="1050" dirty="0"/>
           </a:p>
         </p:txBody>
       </p:sp>
@@ -3532,7 +3565,7 @@
           </a:xfrm>
           <a:prstGeom prst="roundRect">
             <a:avLst>
-              <a:gd name="adj" fmla="val 15625"/>
+              <a:gd name="adj" fmla="val 7813"/>
             </a:avLst>
           </a:prstGeom>
           <a:solidFill>
@@ -3541,14 +3574,14 @@
           <a:ln/>
         </p:spPr>
         <p:txBody>
-          <a:bodyPr wrap="square" lIns="0" tIns="0" rIns="0" bIns="0" rtlCol="0" anchor="ctr"/>
+          <a:bodyPr wrap="none" lIns="0" tIns="0" rIns="0" bIns="0" rtlCol="0" anchor="ctr"/>
           <a:lstStyle/>
           <a:p>
             <a:pPr algn="ctr" indent="0" marL="0">
               <a:buNone/>
             </a:pPr>
             <a:r>
-              <a:rPr lang="ja-JP" altLang="en-US" sz="1100" dirty="0">
+              <a:rPr lang="ja-JP" altLang="en-US" sz="1050" dirty="0">
                 <a:solidFill>
                   <a:srgbClr val="404040"/>
                 </a:solidFill>
@@ -3558,7 +3591,7 @@
               </a:rPr>
               <a:t>演習</a:t>
             </a:r>
-            <a:endParaRPr lang="ja-JP" sz="1100" dirty="0"/>
+            <a:endParaRPr lang="ja-JP" sz="1050" dirty="0"/>
           </a:p>
         </p:txBody>
       </p:sp>
@@ -3575,7 +3608,7 @@
           </a:xfrm>
           <a:prstGeom prst="roundRect">
             <a:avLst>
-              <a:gd name="adj" fmla="val 15625"/>
+              <a:gd name="adj" fmla="val 7813"/>
             </a:avLst>
           </a:prstGeom>
           <a:solidFill>
@@ -3584,14 +3617,14 @@
           <a:ln/>
         </p:spPr>
         <p:txBody>
-          <a:bodyPr wrap="square" lIns="0" tIns="0" rIns="0" bIns="0" rtlCol="0" anchor="ctr"/>
+          <a:bodyPr wrap="none" lIns="0" tIns="0" rIns="0" bIns="0" rtlCol="0" anchor="ctr"/>
           <a:lstStyle/>
           <a:p>
             <a:pPr algn="ctr" indent="0" marL="0">
               <a:buNone/>
             </a:pPr>
             <a:r>
-              <a:rPr lang="ja-JP" altLang="en-US" sz="1100" dirty="0">
+              <a:rPr lang="ja-JP" altLang="en-US" sz="1050" dirty="0">
                 <a:solidFill>
                   <a:srgbClr val="404040"/>
                 </a:solidFill>
@@ -3601,7 +3634,7 @@
               </a:rPr>
               <a:t>検算</a:t>
             </a:r>
-            <a:endParaRPr lang="ja-JP" sz="1100" dirty="0"/>
+            <a:endParaRPr lang="ja-JP" sz="1050" dirty="0"/>
           </a:p>
         </p:txBody>
       </p:sp>
@@ -3618,7 +3651,7 @@
           </a:xfrm>
           <a:prstGeom prst="roundRect">
             <a:avLst>
-              <a:gd name="adj" fmla="val 15625"/>
+              <a:gd name="adj" fmla="val 7813"/>
             </a:avLst>
           </a:prstGeom>
           <a:solidFill>
@@ -3627,14 +3660,14 @@
           <a:ln/>
         </p:spPr>
         <p:txBody>
-          <a:bodyPr wrap="square" lIns="0" tIns="0" rIns="0" bIns="0" rtlCol="0" anchor="ctr"/>
+          <a:bodyPr wrap="none" lIns="0" tIns="0" rIns="0" bIns="0" rtlCol="0" anchor="ctr"/>
           <a:lstStyle/>
           <a:p>
             <a:pPr algn="ctr" indent="0" marL="0">
               <a:buNone/>
             </a:pPr>
             <a:r>
-              <a:rPr lang="ja-JP" altLang="en-US" sz="1100" dirty="0">
+              <a:rPr lang="ja-JP" altLang="en-US" sz="1050" dirty="0">
                 <a:solidFill>
                   <a:srgbClr val="404040"/>
                 </a:solidFill>
@@ -3644,7 +3677,7 @@
               </a:rPr>
               <a:t>落とし穴</a:t>
             </a:r>
-            <a:endParaRPr lang="ja-JP" sz="1100" dirty="0"/>
+            <a:endParaRPr lang="ja-JP" sz="1050" dirty="0"/>
           </a:p>
         </p:txBody>
       </p:sp>
@@ -3974,7 +4007,7 @@
           </a:xfrm>
           <a:prstGeom prst="roundRect">
             <a:avLst>
-              <a:gd name="adj" fmla="val 15625"/>
+              <a:gd name="adj" fmla="val 7813"/>
             </a:avLst>
           </a:prstGeom>
           <a:solidFill>
@@ -3983,14 +4016,14 @@
           <a:ln/>
         </p:spPr>
         <p:txBody>
-          <a:bodyPr wrap="square" lIns="0" tIns="0" rIns="0" bIns="0" rtlCol="0" anchor="ctr"/>
+          <a:bodyPr wrap="none" lIns="0" tIns="0" rIns="0" bIns="0" rtlCol="0" anchor="ctr"/>
           <a:lstStyle/>
           <a:p>
             <a:pPr algn="ctr" indent="0" marL="0">
               <a:buNone/>
             </a:pPr>
             <a:r>
-              <a:rPr lang="ja-JP" altLang="en-US" sz="1100" dirty="0">
+              <a:rPr lang="ja-JP" altLang="en-US" sz="1050" dirty="0">
                 <a:solidFill>
                   <a:srgbClr val="404040"/>
                 </a:solidFill>
@@ -4000,7 +4033,7 @@
               </a:rPr>
               <a:t>定義</a:t>
             </a:r>
-            <a:endParaRPr lang="ja-JP" sz="1100" dirty="0"/>
+            <a:endParaRPr lang="ja-JP" sz="1050" dirty="0"/>
           </a:p>
         </p:txBody>
       </p:sp>
@@ -4017,7 +4050,7 @@
           </a:xfrm>
           <a:prstGeom prst="roundRect">
             <a:avLst>
-              <a:gd name="adj" fmla="val 15625"/>
+              <a:gd name="adj" fmla="val 7813"/>
             </a:avLst>
           </a:prstGeom>
           <a:solidFill>
@@ -4026,14 +4059,14 @@
           <a:ln/>
         </p:spPr>
         <p:txBody>
-          <a:bodyPr wrap="square" lIns="0" tIns="0" rIns="0" bIns="0" rtlCol="0" anchor="ctr"/>
+          <a:bodyPr wrap="none" lIns="0" tIns="0" rIns="0" bIns="0" rtlCol="0" anchor="ctr"/>
           <a:lstStyle/>
           <a:p>
             <a:pPr algn="ctr" indent="0" marL="0">
               <a:buNone/>
             </a:pPr>
             <a:r>
-              <a:rPr lang="ja-JP" altLang="en-US" sz="1100" b="1" dirty="0">
+              <a:rPr lang="ja-JP" altLang="en-US" sz="1050" b="1" dirty="0">
                 <a:solidFill>
                   <a:srgbClr val="FFFFFF"/>
                 </a:solidFill>
@@ -4043,7 +4076,7 @@
               </a:rPr>
               <a:t>式</a:t>
             </a:r>
-            <a:endParaRPr lang="ja-JP" sz="1100" dirty="0"/>
+            <a:endParaRPr lang="ja-JP" sz="1050" dirty="0"/>
           </a:p>
         </p:txBody>
       </p:sp>
@@ -4060,7 +4093,7 @@
           </a:xfrm>
           <a:prstGeom prst="roundRect">
             <a:avLst>
-              <a:gd name="adj" fmla="val 15625"/>
+              <a:gd name="adj" fmla="val 7813"/>
             </a:avLst>
           </a:prstGeom>
           <a:solidFill>
@@ -4069,14 +4102,14 @@
           <a:ln/>
         </p:spPr>
         <p:txBody>
-          <a:bodyPr wrap="square" lIns="0" tIns="0" rIns="0" bIns="0" rtlCol="0" anchor="ctr"/>
+          <a:bodyPr wrap="none" lIns="0" tIns="0" rIns="0" bIns="0" rtlCol="0" anchor="ctr"/>
           <a:lstStyle/>
           <a:p>
             <a:pPr algn="ctr" indent="0" marL="0">
               <a:buNone/>
             </a:pPr>
             <a:r>
-              <a:rPr lang="ja-JP" altLang="en-US" sz="1100" dirty="0">
+              <a:rPr lang="ja-JP" altLang="en-US" sz="1050" dirty="0">
                 <a:solidFill>
                   <a:srgbClr val="404040"/>
                 </a:solidFill>
@@ -4086,7 +4119,7 @@
               </a:rPr>
               <a:t>演習</a:t>
             </a:r>
-            <a:endParaRPr lang="ja-JP" sz="1100" dirty="0"/>
+            <a:endParaRPr lang="ja-JP" sz="1050" dirty="0"/>
           </a:p>
         </p:txBody>
       </p:sp>
@@ -4103,7 +4136,7 @@
           </a:xfrm>
           <a:prstGeom prst="roundRect">
             <a:avLst>
-              <a:gd name="adj" fmla="val 15625"/>
+              <a:gd name="adj" fmla="val 7813"/>
             </a:avLst>
           </a:prstGeom>
           <a:solidFill>
@@ -4112,14 +4145,14 @@
           <a:ln/>
         </p:spPr>
         <p:txBody>
-          <a:bodyPr wrap="square" lIns="0" tIns="0" rIns="0" bIns="0" rtlCol="0" anchor="ctr"/>
+          <a:bodyPr wrap="none" lIns="0" tIns="0" rIns="0" bIns="0" rtlCol="0" anchor="ctr"/>
           <a:lstStyle/>
           <a:p>
             <a:pPr algn="ctr" indent="0" marL="0">
               <a:buNone/>
             </a:pPr>
             <a:r>
-              <a:rPr lang="ja-JP" altLang="en-US" sz="1100" dirty="0">
+              <a:rPr lang="ja-JP" altLang="en-US" sz="1050" dirty="0">
                 <a:solidFill>
                   <a:srgbClr val="404040"/>
                 </a:solidFill>
@@ -4129,7 +4162,7 @@
               </a:rPr>
               <a:t>検算</a:t>
             </a:r>
-            <a:endParaRPr lang="ja-JP" sz="1100" dirty="0"/>
+            <a:endParaRPr lang="ja-JP" sz="1050" dirty="0"/>
           </a:p>
         </p:txBody>
       </p:sp>
@@ -4146,7 +4179,7 @@
           </a:xfrm>
           <a:prstGeom prst="roundRect">
             <a:avLst>
-              <a:gd name="adj" fmla="val 15625"/>
+              <a:gd name="adj" fmla="val 7813"/>
             </a:avLst>
           </a:prstGeom>
           <a:solidFill>
@@ -4155,14 +4188,14 @@
           <a:ln/>
         </p:spPr>
         <p:txBody>
-          <a:bodyPr wrap="square" lIns="0" tIns="0" rIns="0" bIns="0" rtlCol="0" anchor="ctr"/>
+          <a:bodyPr wrap="none" lIns="0" tIns="0" rIns="0" bIns="0" rtlCol="0" anchor="ctr"/>
           <a:lstStyle/>
           <a:p>
             <a:pPr algn="ctr" indent="0" marL="0">
               <a:buNone/>
             </a:pPr>
             <a:r>
-              <a:rPr lang="ja-JP" altLang="en-US" sz="1100" dirty="0">
+              <a:rPr lang="ja-JP" altLang="en-US" sz="1050" dirty="0">
                 <a:solidFill>
                   <a:srgbClr val="404040"/>
                 </a:solidFill>
@@ -4172,7 +4205,7 @@
               </a:rPr>
               <a:t>落とし穴</a:t>
             </a:r>
-            <a:endParaRPr lang="ja-JP" sz="1100" dirty="0"/>
+            <a:endParaRPr lang="ja-JP" sz="1050" dirty="0"/>
           </a:p>
         </p:txBody>
       </p:sp>
@@ -4545,7 +4578,7 @@
           </a:xfrm>
           <a:prstGeom prst="roundRect">
             <a:avLst>
-              <a:gd name="adj" fmla="val 15625"/>
+              <a:gd name="adj" fmla="val 7813"/>
             </a:avLst>
           </a:prstGeom>
           <a:solidFill>
@@ -4554,14 +4587,14 @@
           <a:ln/>
         </p:spPr>
         <p:txBody>
-          <a:bodyPr wrap="square" lIns="0" tIns="0" rIns="0" bIns="0" rtlCol="0" anchor="ctr"/>
+          <a:bodyPr wrap="none" lIns="0" tIns="0" rIns="0" bIns="0" rtlCol="0" anchor="ctr"/>
           <a:lstStyle/>
           <a:p>
             <a:pPr algn="ctr" indent="0" marL="0">
               <a:buNone/>
             </a:pPr>
             <a:r>
-              <a:rPr lang="ja-JP" altLang="en-US" sz="1100" dirty="0">
+              <a:rPr lang="ja-JP" altLang="en-US" sz="1050" dirty="0">
                 <a:solidFill>
                   <a:srgbClr val="404040"/>
                 </a:solidFill>
@@ -4571,7 +4604,7 @@
               </a:rPr>
               <a:t>定義</a:t>
             </a:r>
-            <a:endParaRPr lang="ja-JP" sz="1100" dirty="0"/>
+            <a:endParaRPr lang="ja-JP" sz="1050" dirty="0"/>
           </a:p>
         </p:txBody>
       </p:sp>
@@ -4588,7 +4621,7 @@
           </a:xfrm>
           <a:prstGeom prst="roundRect">
             <a:avLst>
-              <a:gd name="adj" fmla="val 15625"/>
+              <a:gd name="adj" fmla="val 7813"/>
             </a:avLst>
           </a:prstGeom>
           <a:solidFill>
@@ -4597,14 +4630,14 @@
           <a:ln/>
         </p:spPr>
         <p:txBody>
-          <a:bodyPr wrap="square" lIns="0" tIns="0" rIns="0" bIns="0" rtlCol="0" anchor="ctr"/>
+          <a:bodyPr wrap="none" lIns="0" tIns="0" rIns="0" bIns="0" rtlCol="0" anchor="ctr"/>
           <a:lstStyle/>
           <a:p>
             <a:pPr algn="ctr" indent="0" marL="0">
               <a:buNone/>
             </a:pPr>
             <a:r>
-              <a:rPr lang="ja-JP" altLang="en-US" sz="1100" b="1" dirty="0">
+              <a:rPr lang="ja-JP" altLang="en-US" sz="1050" b="1" dirty="0">
                 <a:solidFill>
                   <a:srgbClr val="FFFFFF"/>
                 </a:solidFill>
@@ -4614,7 +4647,7 @@
               </a:rPr>
               <a:t>式</a:t>
             </a:r>
-            <a:endParaRPr lang="ja-JP" sz="1100" dirty="0"/>
+            <a:endParaRPr lang="ja-JP" sz="1050" dirty="0"/>
           </a:p>
         </p:txBody>
       </p:sp>
@@ -4631,7 +4664,7 @@
           </a:xfrm>
           <a:prstGeom prst="roundRect">
             <a:avLst>
-              <a:gd name="adj" fmla="val 15625"/>
+              <a:gd name="adj" fmla="val 7813"/>
             </a:avLst>
           </a:prstGeom>
           <a:solidFill>
@@ -4640,14 +4673,14 @@
           <a:ln/>
         </p:spPr>
         <p:txBody>
-          <a:bodyPr wrap="square" lIns="0" tIns="0" rIns="0" bIns="0" rtlCol="0" anchor="ctr"/>
+          <a:bodyPr wrap="none" lIns="0" tIns="0" rIns="0" bIns="0" rtlCol="0" anchor="ctr"/>
           <a:lstStyle/>
           <a:p>
             <a:pPr algn="ctr" indent="0" marL="0">
               <a:buNone/>
             </a:pPr>
             <a:r>
-              <a:rPr lang="ja-JP" altLang="en-US" sz="1100" dirty="0">
+              <a:rPr lang="ja-JP" altLang="en-US" sz="1050" dirty="0">
                 <a:solidFill>
                   <a:srgbClr val="404040"/>
                 </a:solidFill>
@@ -4657,7 +4690,7 @@
               </a:rPr>
               <a:t>演習</a:t>
             </a:r>
-            <a:endParaRPr lang="ja-JP" sz="1100" dirty="0"/>
+            <a:endParaRPr lang="ja-JP" sz="1050" dirty="0"/>
           </a:p>
         </p:txBody>
       </p:sp>
@@ -4674,7 +4707,7 @@
           </a:xfrm>
           <a:prstGeom prst="roundRect">
             <a:avLst>
-              <a:gd name="adj" fmla="val 15625"/>
+              <a:gd name="adj" fmla="val 7813"/>
             </a:avLst>
           </a:prstGeom>
           <a:solidFill>
@@ -4683,14 +4716,14 @@
           <a:ln/>
         </p:spPr>
         <p:txBody>
-          <a:bodyPr wrap="square" lIns="0" tIns="0" rIns="0" bIns="0" rtlCol="0" anchor="ctr"/>
+          <a:bodyPr wrap="none" lIns="0" tIns="0" rIns="0" bIns="0" rtlCol="0" anchor="ctr"/>
           <a:lstStyle/>
           <a:p>
             <a:pPr algn="ctr" indent="0" marL="0">
               <a:buNone/>
             </a:pPr>
             <a:r>
-              <a:rPr lang="ja-JP" altLang="en-US" sz="1100" dirty="0">
+              <a:rPr lang="ja-JP" altLang="en-US" sz="1050" dirty="0">
                 <a:solidFill>
                   <a:srgbClr val="404040"/>
                 </a:solidFill>
@@ -4700,7 +4733,7 @@
               </a:rPr>
               <a:t>検算</a:t>
             </a:r>
-            <a:endParaRPr lang="ja-JP" sz="1100" dirty="0"/>
+            <a:endParaRPr lang="ja-JP" sz="1050" dirty="0"/>
           </a:p>
         </p:txBody>
       </p:sp>
@@ -4717,7 +4750,7 @@
           </a:xfrm>
           <a:prstGeom prst="roundRect">
             <a:avLst>
-              <a:gd name="adj" fmla="val 15625"/>
+              <a:gd name="adj" fmla="val 7813"/>
             </a:avLst>
           </a:prstGeom>
           <a:solidFill>
@@ -4726,14 +4759,14 @@
           <a:ln/>
         </p:spPr>
         <p:txBody>
-          <a:bodyPr wrap="square" lIns="0" tIns="0" rIns="0" bIns="0" rtlCol="0" anchor="ctr"/>
+          <a:bodyPr wrap="none" lIns="0" tIns="0" rIns="0" bIns="0" rtlCol="0" anchor="ctr"/>
           <a:lstStyle/>
           <a:p>
             <a:pPr algn="ctr" indent="0" marL="0">
               <a:buNone/>
             </a:pPr>
             <a:r>
-              <a:rPr lang="ja-JP" altLang="en-US" sz="1100" dirty="0">
+              <a:rPr lang="ja-JP" altLang="en-US" sz="1050" dirty="0">
                 <a:solidFill>
                   <a:srgbClr val="404040"/>
                 </a:solidFill>
@@ -4743,7 +4776,7 @@
               </a:rPr>
               <a:t>落とし穴</a:t>
             </a:r>
-            <a:endParaRPr lang="ja-JP" sz="1100" dirty="0"/>
+            <a:endParaRPr lang="ja-JP" sz="1050" dirty="0"/>
           </a:p>
         </p:txBody>
       </p:sp>
@@ -4923,7 +4956,7 @@
                     <a:bodyPr/>
                     <a:lstStyle/>
                     <a:p>
-                      <a:pPr algn="ctr" indent="0" marL="0">
+                      <a:pPr algn="l" indent="0" marL="0">
                         <a:buNone/>
                       </a:pPr>
                       <a:r>
@@ -4991,7 +5024,7 @@
                     <a:bodyPr/>
                     <a:lstStyle/>
                     <a:p>
-                      <a:pPr algn="ctr" indent="0" marL="0">
+                      <a:pPr algn="l" indent="0" marL="0">
                         <a:buNone/>
                       </a:pPr>
                       <a:r>
@@ -5827,7 +5860,7 @@
           </a:xfrm>
           <a:prstGeom prst="roundRect">
             <a:avLst>
-              <a:gd name="adj" fmla="val 15625"/>
+              <a:gd name="adj" fmla="val 7813"/>
             </a:avLst>
           </a:prstGeom>
           <a:solidFill>
@@ -5836,14 +5869,14 @@
           <a:ln/>
         </p:spPr>
         <p:txBody>
-          <a:bodyPr wrap="square" lIns="0" tIns="0" rIns="0" bIns="0" rtlCol="0" anchor="ctr"/>
+          <a:bodyPr wrap="none" lIns="0" tIns="0" rIns="0" bIns="0" rtlCol="0" anchor="ctr"/>
           <a:lstStyle/>
           <a:p>
             <a:pPr algn="ctr" indent="0" marL="0">
               <a:buNone/>
             </a:pPr>
             <a:r>
-              <a:rPr lang="ja-JP" altLang="en-US" sz="1100" dirty="0">
+              <a:rPr lang="ja-JP" altLang="en-US" sz="1050" dirty="0">
                 <a:solidFill>
                   <a:srgbClr val="404040"/>
                 </a:solidFill>
@@ -5853,7 +5886,7 @@
               </a:rPr>
               <a:t>定義</a:t>
             </a:r>
-            <a:endParaRPr lang="ja-JP" sz="1100" dirty="0"/>
+            <a:endParaRPr lang="ja-JP" sz="1050" dirty="0"/>
           </a:p>
         </p:txBody>
       </p:sp>
@@ -5870,7 +5903,7 @@
           </a:xfrm>
           <a:prstGeom prst="roundRect">
             <a:avLst>
-              <a:gd name="adj" fmla="val 15625"/>
+              <a:gd name="adj" fmla="val 7813"/>
             </a:avLst>
           </a:prstGeom>
           <a:solidFill>
@@ -5879,14 +5912,14 @@
           <a:ln/>
         </p:spPr>
         <p:txBody>
-          <a:bodyPr wrap="square" lIns="0" tIns="0" rIns="0" bIns="0" rtlCol="0" anchor="ctr"/>
+          <a:bodyPr wrap="none" lIns="0" tIns="0" rIns="0" bIns="0" rtlCol="0" anchor="ctr"/>
           <a:lstStyle/>
           <a:p>
             <a:pPr algn="ctr" indent="0" marL="0">
               <a:buNone/>
             </a:pPr>
             <a:r>
-              <a:rPr lang="ja-JP" altLang="en-US" sz="1100" dirty="0">
+              <a:rPr lang="ja-JP" altLang="en-US" sz="1050" dirty="0">
                 <a:solidFill>
                   <a:srgbClr val="404040"/>
                 </a:solidFill>
@@ -5896,7 +5929,7 @@
               </a:rPr>
               <a:t>式</a:t>
             </a:r>
-            <a:endParaRPr lang="ja-JP" sz="1100" dirty="0"/>
+            <a:endParaRPr lang="ja-JP" sz="1050" dirty="0"/>
           </a:p>
         </p:txBody>
       </p:sp>
@@ -5913,7 +5946,7 @@
           </a:xfrm>
           <a:prstGeom prst="roundRect">
             <a:avLst>
-              <a:gd name="adj" fmla="val 15625"/>
+              <a:gd name="adj" fmla="val 7813"/>
             </a:avLst>
           </a:prstGeom>
           <a:solidFill>
@@ -5922,14 +5955,14 @@
           <a:ln/>
         </p:spPr>
         <p:txBody>
-          <a:bodyPr wrap="square" lIns="0" tIns="0" rIns="0" bIns="0" rtlCol="0" anchor="ctr"/>
+          <a:bodyPr wrap="none" lIns="0" tIns="0" rIns="0" bIns="0" rtlCol="0" anchor="ctr"/>
           <a:lstStyle/>
           <a:p>
             <a:pPr algn="ctr" indent="0" marL="0">
               <a:buNone/>
             </a:pPr>
             <a:r>
-              <a:rPr lang="ja-JP" altLang="en-US" sz="1100" b="1" dirty="0">
+              <a:rPr lang="ja-JP" altLang="en-US" sz="1050" b="1" dirty="0">
                 <a:solidFill>
                   <a:srgbClr val="FFFFFF"/>
                 </a:solidFill>
@@ -5939,7 +5972,7 @@
               </a:rPr>
               <a:t>演習</a:t>
             </a:r>
-            <a:endParaRPr lang="ja-JP" sz="1100" dirty="0"/>
+            <a:endParaRPr lang="ja-JP" sz="1050" dirty="0"/>
           </a:p>
         </p:txBody>
       </p:sp>
@@ -5956,7 +5989,7 @@
           </a:xfrm>
           <a:prstGeom prst="roundRect">
             <a:avLst>
-              <a:gd name="adj" fmla="val 15625"/>
+              <a:gd name="adj" fmla="val 7813"/>
             </a:avLst>
           </a:prstGeom>
           <a:solidFill>
@@ -5965,14 +5998,14 @@
           <a:ln/>
         </p:spPr>
         <p:txBody>
-          <a:bodyPr wrap="square" lIns="0" tIns="0" rIns="0" bIns="0" rtlCol="0" anchor="ctr"/>
+          <a:bodyPr wrap="none" lIns="0" tIns="0" rIns="0" bIns="0" rtlCol="0" anchor="ctr"/>
           <a:lstStyle/>
           <a:p>
             <a:pPr algn="ctr" indent="0" marL="0">
               <a:buNone/>
             </a:pPr>
             <a:r>
-              <a:rPr lang="ja-JP" altLang="en-US" sz="1100" dirty="0">
+              <a:rPr lang="ja-JP" altLang="en-US" sz="1050" dirty="0">
                 <a:solidFill>
                   <a:srgbClr val="404040"/>
                 </a:solidFill>
@@ -5982,7 +6015,7 @@
               </a:rPr>
               <a:t>検算</a:t>
             </a:r>
-            <a:endParaRPr lang="ja-JP" sz="1100" dirty="0"/>
+            <a:endParaRPr lang="ja-JP" sz="1050" dirty="0"/>
           </a:p>
         </p:txBody>
       </p:sp>
@@ -5999,7 +6032,7 @@
           </a:xfrm>
           <a:prstGeom prst="roundRect">
             <a:avLst>
-              <a:gd name="adj" fmla="val 15625"/>
+              <a:gd name="adj" fmla="val 7813"/>
             </a:avLst>
           </a:prstGeom>
           <a:solidFill>
@@ -6008,14 +6041,14 @@
           <a:ln/>
         </p:spPr>
         <p:txBody>
-          <a:bodyPr wrap="square" lIns="0" tIns="0" rIns="0" bIns="0" rtlCol="0" anchor="ctr"/>
+          <a:bodyPr wrap="none" lIns="0" tIns="0" rIns="0" bIns="0" rtlCol="0" anchor="ctr"/>
           <a:lstStyle/>
           <a:p>
             <a:pPr algn="ctr" indent="0" marL="0">
               <a:buNone/>
             </a:pPr>
             <a:r>
-              <a:rPr lang="ja-JP" altLang="en-US" sz="1100" dirty="0">
+              <a:rPr lang="ja-JP" altLang="en-US" sz="1050" dirty="0">
                 <a:solidFill>
                   <a:srgbClr val="404040"/>
                 </a:solidFill>
@@ -6025,7 +6058,7 @@
               </a:rPr>
               <a:t>落とし穴</a:t>
             </a:r>
-            <a:endParaRPr lang="ja-JP" sz="1100" dirty="0"/>
+            <a:endParaRPr lang="ja-JP" sz="1050" dirty="0"/>
           </a:p>
         </p:txBody>
       </p:sp>
@@ -6116,11 +6149,11 @@
         <p:spPr>
           <a:xfrm>
             <a:off x="502920" y="1691640"/>
-            <a:ext cx="11183112" cy="1304849"/>
+            <a:ext cx="11183112" cy="1234440"/>
           </a:xfrm>
           <a:prstGeom prst="roundRect">
             <a:avLst>
-              <a:gd name="adj" fmla="val 5606"/>
+              <a:gd name="adj" fmla="val 5926"/>
             </a:avLst>
           </a:prstGeom>
           <a:solidFill>
@@ -6137,7 +6170,7 @@
         </p:nvSpPr>
         <p:spPr>
           <a:xfrm>
-            <a:off x="667512" y="2015338"/>
+            <a:off x="667512" y="1979676"/>
             <a:ext cx="960120" cy="658368"/>
           </a:xfrm>
           <a:prstGeom prst="roundRect">
@@ -6180,7 +6213,7 @@
         </p:nvSpPr>
         <p:spPr>
           <a:xfrm>
-            <a:off x="1847088" y="1846174"/>
+            <a:off x="1847088" y="1810512"/>
             <a:ext cx="9674352" cy="996696"/>
           </a:xfrm>
           <a:prstGeom prst="rect">
@@ -6242,12 +6275,12 @@
         </p:nvSpPr>
         <p:spPr>
           <a:xfrm>
-            <a:off x="502920" y="3215945"/>
-            <a:ext cx="11183112" cy="1304849"/>
+            <a:off x="502920" y="3200400"/>
+            <a:ext cx="11183112" cy="1234440"/>
           </a:xfrm>
           <a:prstGeom prst="roundRect">
             <a:avLst>
-              <a:gd name="adj" fmla="val 5606"/>
+              <a:gd name="adj" fmla="val 5926"/>
             </a:avLst>
           </a:prstGeom>
           <a:solidFill>
@@ -6264,7 +6297,7 @@
         </p:nvSpPr>
         <p:spPr>
           <a:xfrm>
-            <a:off x="667512" y="3539642"/>
+            <a:off x="667512" y="3488436"/>
             <a:ext cx="960120" cy="658368"/>
           </a:xfrm>
           <a:prstGeom prst="roundRect">
@@ -6307,7 +6340,7 @@
         </p:nvSpPr>
         <p:spPr>
           <a:xfrm>
-            <a:off x="1847088" y="3370478"/>
+            <a:off x="1847088" y="3319272"/>
             <a:ext cx="9674352" cy="996696"/>
           </a:xfrm>
           <a:prstGeom prst="rect">
@@ -6369,12 +6402,12 @@
         </p:nvSpPr>
         <p:spPr>
           <a:xfrm>
-            <a:off x="502920" y="4740250"/>
-            <a:ext cx="11183112" cy="1304849"/>
+            <a:off x="502920" y="4709160"/>
+            <a:ext cx="11183112" cy="1234440"/>
           </a:xfrm>
           <a:prstGeom prst="roundRect">
             <a:avLst>
-              <a:gd name="adj" fmla="val 5606"/>
+              <a:gd name="adj" fmla="val 5926"/>
             </a:avLst>
           </a:prstGeom>
           <a:solidFill>
@@ -6391,7 +6424,7 @@
         </p:nvSpPr>
         <p:spPr>
           <a:xfrm>
-            <a:off x="667512" y="5063947"/>
+            <a:off x="667512" y="4997196"/>
             <a:ext cx="960120" cy="658368"/>
           </a:xfrm>
           <a:prstGeom prst="roundRect">
@@ -6434,7 +6467,7 @@
         </p:nvSpPr>
         <p:spPr>
           <a:xfrm>
-            <a:off x="1847088" y="4894783"/>
+            <a:off x="1847088" y="4828032"/>
             <a:ext cx="9674352" cy="996696"/>
           </a:xfrm>
           <a:prstGeom prst="rect">
@@ -6597,7 +6630,7 @@
           </a:xfrm>
           <a:prstGeom prst="roundRect">
             <a:avLst>
-              <a:gd name="adj" fmla="val 15625"/>
+              <a:gd name="adj" fmla="val 7813"/>
             </a:avLst>
           </a:prstGeom>
           <a:solidFill>
@@ -6606,14 +6639,14 @@
           <a:ln/>
         </p:spPr>
         <p:txBody>
-          <a:bodyPr wrap="square" lIns="0" tIns="0" rIns="0" bIns="0" rtlCol="0" anchor="ctr"/>
+          <a:bodyPr wrap="none" lIns="0" tIns="0" rIns="0" bIns="0" rtlCol="0" anchor="ctr"/>
           <a:lstStyle/>
           <a:p>
             <a:pPr algn="ctr" indent="0" marL="0">
               <a:buNone/>
             </a:pPr>
             <a:r>
-              <a:rPr lang="ja-JP" altLang="en-US" sz="1100" dirty="0">
+              <a:rPr lang="ja-JP" altLang="en-US" sz="1050" dirty="0">
                 <a:solidFill>
                   <a:srgbClr val="404040"/>
                 </a:solidFill>
@@ -6623,7 +6656,7 @@
               </a:rPr>
               <a:t>定義</a:t>
             </a:r>
-            <a:endParaRPr lang="ja-JP" sz="1100" dirty="0"/>
+            <a:endParaRPr lang="ja-JP" sz="1050" dirty="0"/>
           </a:p>
         </p:txBody>
       </p:sp>
@@ -6640,7 +6673,7 @@
           </a:xfrm>
           <a:prstGeom prst="roundRect">
             <a:avLst>
-              <a:gd name="adj" fmla="val 15625"/>
+              <a:gd name="adj" fmla="val 7813"/>
             </a:avLst>
           </a:prstGeom>
           <a:solidFill>
@@ -6649,14 +6682,14 @@
           <a:ln/>
         </p:spPr>
         <p:txBody>
-          <a:bodyPr wrap="square" lIns="0" tIns="0" rIns="0" bIns="0" rtlCol="0" anchor="ctr"/>
+          <a:bodyPr wrap="none" lIns="0" tIns="0" rIns="0" bIns="0" rtlCol="0" anchor="ctr"/>
           <a:lstStyle/>
           <a:p>
             <a:pPr algn="ctr" indent="0" marL="0">
               <a:buNone/>
             </a:pPr>
             <a:r>
-              <a:rPr lang="ja-JP" altLang="en-US" sz="1100" dirty="0">
+              <a:rPr lang="ja-JP" altLang="en-US" sz="1050" dirty="0">
                 <a:solidFill>
                   <a:srgbClr val="404040"/>
                 </a:solidFill>
@@ -6666,7 +6699,7 @@
               </a:rPr>
               <a:t>式</a:t>
             </a:r>
-            <a:endParaRPr lang="ja-JP" sz="1100" dirty="0"/>
+            <a:endParaRPr lang="ja-JP" sz="1050" dirty="0"/>
           </a:p>
         </p:txBody>
       </p:sp>
@@ -6683,7 +6716,7 @@
           </a:xfrm>
           <a:prstGeom prst="roundRect">
             <a:avLst>
-              <a:gd name="adj" fmla="val 15625"/>
+              <a:gd name="adj" fmla="val 7813"/>
             </a:avLst>
           </a:prstGeom>
           <a:solidFill>
@@ -6692,14 +6725,14 @@
           <a:ln/>
         </p:spPr>
         <p:txBody>
-          <a:bodyPr wrap="square" lIns="0" tIns="0" rIns="0" bIns="0" rtlCol="0" anchor="ctr"/>
+          <a:bodyPr wrap="none" lIns="0" tIns="0" rIns="0" bIns="0" rtlCol="0" anchor="ctr"/>
           <a:lstStyle/>
           <a:p>
             <a:pPr algn="ctr" indent="0" marL="0">
               <a:buNone/>
             </a:pPr>
             <a:r>
-              <a:rPr lang="ja-JP" altLang="en-US" sz="1100" b="1" dirty="0">
+              <a:rPr lang="ja-JP" altLang="en-US" sz="1050" b="1" dirty="0">
                 <a:solidFill>
                   <a:srgbClr val="FFFFFF"/>
                 </a:solidFill>
@@ -6709,7 +6742,7 @@
               </a:rPr>
               <a:t>演習</a:t>
             </a:r>
-            <a:endParaRPr lang="ja-JP" sz="1100" dirty="0"/>
+            <a:endParaRPr lang="ja-JP" sz="1050" dirty="0"/>
           </a:p>
         </p:txBody>
       </p:sp>
@@ -6726,7 +6759,7 @@
           </a:xfrm>
           <a:prstGeom prst="roundRect">
             <a:avLst>
-              <a:gd name="adj" fmla="val 15625"/>
+              <a:gd name="adj" fmla="val 7813"/>
             </a:avLst>
           </a:prstGeom>
           <a:solidFill>
@@ -6735,14 +6768,14 @@
           <a:ln/>
         </p:spPr>
         <p:txBody>
-          <a:bodyPr wrap="square" lIns="0" tIns="0" rIns="0" bIns="0" rtlCol="0" anchor="ctr"/>
+          <a:bodyPr wrap="none" lIns="0" tIns="0" rIns="0" bIns="0" rtlCol="0" anchor="ctr"/>
           <a:lstStyle/>
           <a:p>
             <a:pPr algn="ctr" indent="0" marL="0">
               <a:buNone/>
             </a:pPr>
             <a:r>
-              <a:rPr lang="ja-JP" altLang="en-US" sz="1100" dirty="0">
+              <a:rPr lang="ja-JP" altLang="en-US" sz="1050" dirty="0">
                 <a:solidFill>
                   <a:srgbClr val="404040"/>
                 </a:solidFill>
@@ -6752,7 +6785,7 @@
               </a:rPr>
               <a:t>検算</a:t>
             </a:r>
-            <a:endParaRPr lang="ja-JP" sz="1100" dirty="0"/>
+            <a:endParaRPr lang="ja-JP" sz="1050" dirty="0"/>
           </a:p>
         </p:txBody>
       </p:sp>
@@ -6769,7 +6802,7 @@
           </a:xfrm>
           <a:prstGeom prst="roundRect">
             <a:avLst>
-              <a:gd name="adj" fmla="val 15625"/>
+              <a:gd name="adj" fmla="val 7813"/>
             </a:avLst>
           </a:prstGeom>
           <a:solidFill>
@@ -6778,14 +6811,14 @@
           <a:ln/>
         </p:spPr>
         <p:txBody>
-          <a:bodyPr wrap="square" lIns="0" tIns="0" rIns="0" bIns="0" rtlCol="0" anchor="ctr"/>
+          <a:bodyPr wrap="none" lIns="0" tIns="0" rIns="0" bIns="0" rtlCol="0" anchor="ctr"/>
           <a:lstStyle/>
           <a:p>
             <a:pPr algn="ctr" indent="0" marL="0">
               <a:buNone/>
             </a:pPr>
             <a:r>
-              <a:rPr lang="ja-JP" altLang="en-US" sz="1100" dirty="0">
+              <a:rPr lang="ja-JP" altLang="en-US" sz="1050" dirty="0">
                 <a:solidFill>
                   <a:srgbClr val="404040"/>
                 </a:solidFill>
@@ -6795,7 +6828,7 @@
               </a:rPr>
               <a:t>落とし穴</a:t>
             </a:r>
-            <a:endParaRPr lang="ja-JP" sz="1100" dirty="0"/>
+            <a:endParaRPr lang="ja-JP" sz="1050" dirty="0"/>
           </a:p>
         </p:txBody>
       </p:sp>
@@ -6885,8 +6918,8 @@
         </p:nvSpPr>
         <p:spPr>
           <a:xfrm>
-            <a:off x="502920" y="1874520"/>
-            <a:ext cx="8001000" cy="539496"/>
+            <a:off x="502920" y="2011680"/>
+            <a:ext cx="7317029" cy="502920"/>
           </a:xfrm>
           <a:prstGeom prst="rect">
             <a:avLst/>
@@ -6902,7 +6935,7 @@
               <a:buNone/>
             </a:pPr>
             <a:r>
-              <a:rPr lang="ja-JP" altLang="en-US" sz="2800" b="1" dirty="0">
+              <a:rPr lang="ja-JP" altLang="en-US" sz="2600" b="1" dirty="0">
                 <a:solidFill>
                   <a:srgbClr val="0072B2"/>
                 </a:solidFill>
@@ -6913,7 +6946,7 @@
               <a:t>濃度：</a:t>
             </a:r>
             <a:r>
-              <a:rPr lang="ja-JP" altLang="en-US" sz="2800" dirty="0">
+              <a:rPr lang="ja-JP" altLang="en-US" sz="2600" dirty="0">
                 <a:solidFill>
                   <a:srgbClr val="262626"/>
                 </a:solidFill>
@@ -6923,7 +6956,7 @@
               </a:rPr>
               <a:t>2 mg × 1,000 ÷ 40 mL = 50 μg/mL</a:t>
             </a:r>
-            <a:endParaRPr lang="ja-JP" sz="2800" dirty="0"/>
+            <a:endParaRPr lang="ja-JP" sz="2600" dirty="0"/>
           </a:p>
         </p:txBody>
       </p:sp>
@@ -6935,8 +6968,8 @@
         </p:nvSpPr>
         <p:spPr>
           <a:xfrm>
-            <a:off x="502920" y="2862072"/>
-            <a:ext cx="8001000" cy="539496"/>
+            <a:off x="502920" y="2944368"/>
+            <a:ext cx="7317029" cy="502920"/>
           </a:xfrm>
           <a:prstGeom prst="rect">
             <a:avLst/>
@@ -6952,7 +6985,7 @@
               <a:buNone/>
             </a:pPr>
             <a:r>
-              <a:rPr lang="ja-JP" altLang="en-US" sz="2800" b="1" dirty="0">
+              <a:rPr lang="ja-JP" altLang="en-US" sz="2600" b="1" dirty="0">
                 <a:solidFill>
                   <a:srgbClr val="0072B2"/>
                 </a:solidFill>
@@ -6963,7 +6996,7 @@
               <a:t>1 分あたり：</a:t>
             </a:r>
             <a:r>
-              <a:rPr lang="ja-JP" altLang="en-US" sz="2800" dirty="0">
+              <a:rPr lang="ja-JP" altLang="en-US" sz="2600" dirty="0">
                 <a:solidFill>
                   <a:srgbClr val="262626"/>
                 </a:solidFill>
@@ -6973,7 +7006,7 @@
               </a:rPr>
               <a:t>0.25 × 60 kg = 15 μg/分</a:t>
             </a:r>
-            <a:endParaRPr lang="ja-JP" sz="2800" dirty="0"/>
+            <a:endParaRPr lang="ja-JP" sz="2600" dirty="0"/>
           </a:p>
         </p:txBody>
       </p:sp>
@@ -6985,8 +7018,8 @@
         </p:nvSpPr>
         <p:spPr>
           <a:xfrm>
-            <a:off x="502920" y="3849624"/>
-            <a:ext cx="8001000" cy="539496"/>
+            <a:off x="502920" y="3877056"/>
+            <a:ext cx="7317029" cy="502920"/>
           </a:xfrm>
           <a:prstGeom prst="rect">
             <a:avLst/>
@@ -7002,7 +7035,7 @@
               <a:buNone/>
             </a:pPr>
             <a:r>
-              <a:rPr lang="ja-JP" altLang="en-US" sz="2800" b="1" dirty="0">
+              <a:rPr lang="ja-JP" altLang="en-US" sz="2600" b="1" dirty="0">
                 <a:solidFill>
                   <a:srgbClr val="0072B2"/>
                 </a:solidFill>
@@ -7013,7 +7046,7 @@
               <a:t>1 時間あたり：</a:t>
             </a:r>
             <a:r>
-              <a:rPr lang="ja-JP" altLang="en-US" sz="2800" dirty="0">
+              <a:rPr lang="ja-JP" altLang="en-US" sz="2600" dirty="0">
                 <a:solidFill>
                   <a:srgbClr val="262626"/>
                 </a:solidFill>
@@ -7023,7 +7056,7 @@
               </a:rPr>
               <a:t>15 × 60 = 900 μg/時</a:t>
             </a:r>
-            <a:endParaRPr lang="ja-JP" sz="2800" dirty="0"/>
+            <a:endParaRPr lang="ja-JP" sz="2600" dirty="0"/>
           </a:p>
         </p:txBody>
       </p:sp>
@@ -7035,8 +7068,8 @@
         </p:nvSpPr>
         <p:spPr>
           <a:xfrm>
-            <a:off x="502920" y="4837176"/>
-            <a:ext cx="8001000" cy="539496"/>
+            <a:off x="502920" y="4809744"/>
+            <a:ext cx="7317029" cy="502920"/>
           </a:xfrm>
           <a:prstGeom prst="rect">
             <a:avLst/>
@@ -7052,7 +7085,7 @@
               <a:buNone/>
             </a:pPr>
             <a:r>
-              <a:rPr lang="ja-JP" altLang="en-US" sz="2800" b="1" dirty="0">
+              <a:rPr lang="ja-JP" altLang="en-US" sz="2600" b="1" dirty="0">
                 <a:solidFill>
                   <a:srgbClr val="0072B2"/>
                 </a:solidFill>
@@ -7063,7 +7096,7 @@
               <a:t>ポンプ：</a:t>
             </a:r>
             <a:r>
-              <a:rPr lang="ja-JP" altLang="en-US" sz="2800" dirty="0">
+              <a:rPr lang="ja-JP" altLang="en-US" sz="2600" dirty="0">
                 <a:solidFill>
                   <a:srgbClr val="262626"/>
                 </a:solidFill>
@@ -7071,20 +7104,9 @@
                 <a:ea typeface="メイリオ" pitchFamily="34" charset="-122"/>
                 <a:cs typeface="メイリオ" pitchFamily="34" charset="-120"/>
               </a:rPr>
-              <a:t>900 ÷ 50 = </a:t>
-            </a:r>
-            <a:r>
-              <a:rPr lang="ja-JP" altLang="en-US" sz="2800" b="1" dirty="0">
-                <a:solidFill>
-                  <a:srgbClr val="D55E00"/>
-                </a:solidFill>
-                <a:latin typeface="メイリオ" pitchFamily="34" charset="0"/>
-                <a:ea typeface="メイリオ" pitchFamily="34" charset="-122"/>
-                <a:cs typeface="メイリオ" pitchFamily="34" charset="-120"/>
-              </a:rPr>
-              <a:t>18 mL/時</a:t>
-            </a:r>
-            <a:endParaRPr lang="ja-JP" sz="2800" dirty="0"/>
+              <a:t>900 ÷ 50 = 18 mL/時</a:t>
+            </a:r>
+            <a:endParaRPr lang="ja-JP" sz="2600" dirty="0"/>
           </a:p>
         </p:txBody>
       </p:sp>
@@ -7096,8 +7118,51 @@
         </p:nvSpPr>
         <p:spPr>
           <a:xfrm>
-            <a:off x="6042355" y="5106924"/>
-            <a:ext cx="2516429" cy="0"/>
+            <a:off x="7874813" y="2066544"/>
+            <a:ext cx="109728" cy="3191256"/>
+          </a:xfrm>
+          <a:custGeom>
+            <a:avLst/>
+            <a:gdLst/>
+            <a:ahLst/>
+            <a:cxnLst/>
+            <a:rect l="l" t="t" r="r" b="b"/>
+            <a:pathLst>
+              <a:path w="109728" h="3191256">
+                <a:moveTo>
+                  <a:pt x="0" y="0"/>
+                </a:moveTo>
+                <a:lnTo>
+                  <a:pt x="109728" y="0"/>
+                </a:lnTo>
+                <a:lnTo>
+                  <a:pt x="109728" y="3191256"/>
+                </a:lnTo>
+                <a:lnTo>
+                  <a:pt x="0" y="3191256"/>
+                </a:lnTo>
+              </a:path>
+            </a:pathLst>
+          </a:custGeom>
+          <a:noFill/>
+          <a:ln w="31750">
+            <a:solidFill>
+              <a:srgbClr val="404040"/>
+            </a:solidFill>
+            <a:prstDash val="solid"/>
+          </a:ln>
+        </p:spPr>
+      </p:sp>
+      <p:sp>
+        <p:nvSpPr>
+          <p:cNvPr id="16" name="Shape 14"/>
+          <p:cNvSpPr/>
+          <p:nvPr/>
+        </p:nvSpPr>
+        <p:spPr>
+          <a:xfrm>
+            <a:off x="7984541" y="3662172"/>
+            <a:ext cx="592531" cy="0"/>
           </a:xfrm>
           <a:prstGeom prst="line">
             <a:avLst/>
@@ -7114,18 +7179,18 @@
       </p:sp>
       <p:sp>
         <p:nvSpPr>
-          <p:cNvPr id="16" name="Text 14"/>
+          <p:cNvPr id="17" name="Text 15"/>
           <p:cNvSpPr/>
           <p:nvPr/>
         </p:nvSpPr>
         <p:spPr>
           <a:xfrm>
-            <a:off x="8668512" y="4443984"/>
-            <a:ext cx="3017520" cy="1325880"/>
+            <a:off x="8668512" y="2976372"/>
+            <a:ext cx="3017520" cy="1371600"/>
           </a:xfrm>
           <a:prstGeom prst="roundRect">
             <a:avLst>
-              <a:gd name="adj" fmla="val 6897"/>
+              <a:gd name="adj" fmla="val 6667"/>
             </a:avLst>
           </a:prstGeom>
           <a:solidFill>
@@ -7268,7 +7333,7 @@
           </a:xfrm>
           <a:prstGeom prst="roundRect">
             <a:avLst>
-              <a:gd name="adj" fmla="val 15625"/>
+              <a:gd name="adj" fmla="val 7813"/>
             </a:avLst>
           </a:prstGeom>
           <a:solidFill>
@@ -7277,14 +7342,14 @@
           <a:ln/>
         </p:spPr>
         <p:txBody>
-          <a:bodyPr wrap="square" lIns="0" tIns="0" rIns="0" bIns="0" rtlCol="0" anchor="ctr"/>
+          <a:bodyPr wrap="none" lIns="0" tIns="0" rIns="0" bIns="0" rtlCol="0" anchor="ctr"/>
           <a:lstStyle/>
           <a:p>
             <a:pPr algn="ctr" indent="0" marL="0">
               <a:buNone/>
             </a:pPr>
             <a:r>
-              <a:rPr lang="ja-JP" altLang="en-US" sz="1100" dirty="0">
+              <a:rPr lang="ja-JP" altLang="en-US" sz="1050" dirty="0">
                 <a:solidFill>
                   <a:srgbClr val="404040"/>
                 </a:solidFill>
@@ -7294,7 +7359,7 @@
               </a:rPr>
               <a:t>定義</a:t>
             </a:r>
-            <a:endParaRPr lang="ja-JP" sz="1100" dirty="0"/>
+            <a:endParaRPr lang="ja-JP" sz="1050" dirty="0"/>
           </a:p>
         </p:txBody>
       </p:sp>
@@ -7311,7 +7376,7 @@
           </a:xfrm>
           <a:prstGeom prst="roundRect">
             <a:avLst>
-              <a:gd name="adj" fmla="val 15625"/>
+              <a:gd name="adj" fmla="val 7813"/>
             </a:avLst>
           </a:prstGeom>
           <a:solidFill>
@@ -7320,14 +7385,14 @@
           <a:ln/>
         </p:spPr>
         <p:txBody>
-          <a:bodyPr wrap="square" lIns="0" tIns="0" rIns="0" bIns="0" rtlCol="0" anchor="ctr"/>
+          <a:bodyPr wrap="none" lIns="0" tIns="0" rIns="0" bIns="0" rtlCol="0" anchor="ctr"/>
           <a:lstStyle/>
           <a:p>
             <a:pPr algn="ctr" indent="0" marL="0">
               <a:buNone/>
             </a:pPr>
             <a:r>
-              <a:rPr lang="ja-JP" altLang="en-US" sz="1100" dirty="0">
+              <a:rPr lang="ja-JP" altLang="en-US" sz="1050" dirty="0">
                 <a:solidFill>
                   <a:srgbClr val="404040"/>
                 </a:solidFill>
@@ -7337,7 +7402,7 @@
               </a:rPr>
               <a:t>式</a:t>
             </a:r>
-            <a:endParaRPr lang="ja-JP" sz="1100" dirty="0"/>
+            <a:endParaRPr lang="ja-JP" sz="1050" dirty="0"/>
           </a:p>
         </p:txBody>
       </p:sp>
@@ -7354,7 +7419,7 @@
           </a:xfrm>
           <a:prstGeom prst="roundRect">
             <a:avLst>
-              <a:gd name="adj" fmla="val 15625"/>
+              <a:gd name="adj" fmla="val 7813"/>
             </a:avLst>
           </a:prstGeom>
           <a:solidFill>
@@ -7363,14 +7428,14 @@
           <a:ln/>
         </p:spPr>
         <p:txBody>
-          <a:bodyPr wrap="square" lIns="0" tIns="0" rIns="0" bIns="0" rtlCol="0" anchor="ctr"/>
+          <a:bodyPr wrap="none" lIns="0" tIns="0" rIns="0" bIns="0" rtlCol="0" anchor="ctr"/>
           <a:lstStyle/>
           <a:p>
             <a:pPr algn="ctr" indent="0" marL="0">
               <a:buNone/>
             </a:pPr>
             <a:r>
-              <a:rPr lang="ja-JP" altLang="en-US" sz="1100" b="1" dirty="0">
+              <a:rPr lang="ja-JP" altLang="en-US" sz="1050" b="1" dirty="0">
                 <a:solidFill>
                   <a:srgbClr val="FFFFFF"/>
                 </a:solidFill>
@@ -7380,7 +7445,7 @@
               </a:rPr>
               <a:t>演習</a:t>
             </a:r>
-            <a:endParaRPr lang="ja-JP" sz="1100" dirty="0"/>
+            <a:endParaRPr lang="ja-JP" sz="1050" dirty="0"/>
           </a:p>
         </p:txBody>
       </p:sp>
@@ -7397,7 +7462,7 @@
           </a:xfrm>
           <a:prstGeom prst="roundRect">
             <a:avLst>
-              <a:gd name="adj" fmla="val 15625"/>
+              <a:gd name="adj" fmla="val 7813"/>
             </a:avLst>
           </a:prstGeom>
           <a:solidFill>
@@ -7406,14 +7471,14 @@
           <a:ln/>
         </p:spPr>
         <p:txBody>
-          <a:bodyPr wrap="square" lIns="0" tIns="0" rIns="0" bIns="0" rtlCol="0" anchor="ctr"/>
+          <a:bodyPr wrap="none" lIns="0" tIns="0" rIns="0" bIns="0" rtlCol="0" anchor="ctr"/>
           <a:lstStyle/>
           <a:p>
             <a:pPr algn="ctr" indent="0" marL="0">
               <a:buNone/>
             </a:pPr>
             <a:r>
-              <a:rPr lang="ja-JP" altLang="en-US" sz="1100" dirty="0">
+              <a:rPr lang="ja-JP" altLang="en-US" sz="1050" dirty="0">
                 <a:solidFill>
                   <a:srgbClr val="404040"/>
                 </a:solidFill>
@@ -7423,7 +7488,7 @@
               </a:rPr>
               <a:t>検算</a:t>
             </a:r>
-            <a:endParaRPr lang="ja-JP" sz="1100" dirty="0"/>
+            <a:endParaRPr lang="ja-JP" sz="1050" dirty="0"/>
           </a:p>
         </p:txBody>
       </p:sp>
@@ -7440,7 +7505,7 @@
           </a:xfrm>
           <a:prstGeom prst="roundRect">
             <a:avLst>
-              <a:gd name="adj" fmla="val 15625"/>
+              <a:gd name="adj" fmla="val 7813"/>
             </a:avLst>
           </a:prstGeom>
           <a:solidFill>
@@ -7449,14 +7514,14 @@
           <a:ln/>
         </p:spPr>
         <p:txBody>
-          <a:bodyPr wrap="square" lIns="0" tIns="0" rIns="0" bIns="0" rtlCol="0" anchor="ctr"/>
+          <a:bodyPr wrap="none" lIns="0" tIns="0" rIns="0" bIns="0" rtlCol="0" anchor="ctr"/>
           <a:lstStyle/>
           <a:p>
             <a:pPr algn="ctr" indent="0" marL="0">
               <a:buNone/>
             </a:pPr>
             <a:r>
-              <a:rPr lang="ja-JP" altLang="en-US" sz="1100" dirty="0">
+              <a:rPr lang="ja-JP" altLang="en-US" sz="1050" dirty="0">
                 <a:solidFill>
                   <a:srgbClr val="404040"/>
                 </a:solidFill>
@@ -7466,7 +7531,7 @@
               </a:rPr>
               <a:t>落とし穴</a:t>
             </a:r>
-            <a:endParaRPr lang="ja-JP" sz="1100" dirty="0"/>
+            <a:endParaRPr lang="ja-JP" sz="1050" dirty="0"/>
           </a:p>
         </p:txBody>
       </p:sp>
@@ -7986,7 +8051,7 @@
         </p:nvSpPr>
         <p:spPr>
           <a:xfrm>
-            <a:off x="6350508" y="3941064"/>
+            <a:off x="6350508" y="4192524"/>
             <a:ext cx="5189220" cy="502920"/>
           </a:xfrm>
           <a:prstGeom prst="rect">
@@ -8028,7 +8093,7 @@
         </p:nvSpPr>
         <p:spPr>
           <a:xfrm>
-            <a:off x="6350508" y="4658868"/>
+            <a:off x="6350508" y="5161788"/>
             <a:ext cx="5189220" cy="0"/>
           </a:xfrm>
           <a:prstGeom prst="line">
@@ -8051,7 +8116,7 @@
         </p:nvSpPr>
         <p:spPr>
           <a:xfrm>
-            <a:off x="6350508" y="4873752"/>
+            <a:off x="6350508" y="5376672"/>
             <a:ext cx="5189220" cy="502920"/>
           </a:xfrm>
           <a:prstGeom prst="rect">
@@ -8205,7 +8270,7 @@
           </a:xfrm>
           <a:prstGeom prst="roundRect">
             <a:avLst>
-              <a:gd name="adj" fmla="val 15625"/>
+              <a:gd name="adj" fmla="val 7813"/>
             </a:avLst>
           </a:prstGeom>
           <a:solidFill>
@@ -8214,14 +8279,14 @@
           <a:ln/>
         </p:spPr>
         <p:txBody>
-          <a:bodyPr wrap="square" lIns="0" tIns="0" rIns="0" bIns="0" rtlCol="0" anchor="ctr"/>
+          <a:bodyPr wrap="none" lIns="0" tIns="0" rIns="0" bIns="0" rtlCol="0" anchor="ctr"/>
           <a:lstStyle/>
           <a:p>
             <a:pPr algn="ctr" indent="0" marL="0">
               <a:buNone/>
             </a:pPr>
             <a:r>
-              <a:rPr lang="ja-JP" altLang="en-US" sz="1100" dirty="0">
+              <a:rPr lang="ja-JP" altLang="en-US" sz="1050" dirty="0">
                 <a:solidFill>
                   <a:srgbClr val="404040"/>
                 </a:solidFill>
@@ -8231,7 +8296,7 @@
               </a:rPr>
               <a:t>定義</a:t>
             </a:r>
-            <a:endParaRPr lang="ja-JP" sz="1100" dirty="0"/>
+            <a:endParaRPr lang="ja-JP" sz="1050" dirty="0"/>
           </a:p>
         </p:txBody>
       </p:sp>
@@ -8248,7 +8313,7 @@
           </a:xfrm>
           <a:prstGeom prst="roundRect">
             <a:avLst>
-              <a:gd name="adj" fmla="val 15625"/>
+              <a:gd name="adj" fmla="val 7813"/>
             </a:avLst>
           </a:prstGeom>
           <a:solidFill>
@@ -8257,14 +8322,14 @@
           <a:ln/>
         </p:spPr>
         <p:txBody>
-          <a:bodyPr wrap="square" lIns="0" tIns="0" rIns="0" bIns="0" rtlCol="0" anchor="ctr"/>
+          <a:bodyPr wrap="none" lIns="0" tIns="0" rIns="0" bIns="0" rtlCol="0" anchor="ctr"/>
           <a:lstStyle/>
           <a:p>
             <a:pPr algn="ctr" indent="0" marL="0">
               <a:buNone/>
             </a:pPr>
             <a:r>
-              <a:rPr lang="ja-JP" altLang="en-US" sz="1100" dirty="0">
+              <a:rPr lang="ja-JP" altLang="en-US" sz="1050" dirty="0">
                 <a:solidFill>
                   <a:srgbClr val="404040"/>
                 </a:solidFill>
@@ -8274,7 +8339,7 @@
               </a:rPr>
               <a:t>式</a:t>
             </a:r>
-            <a:endParaRPr lang="ja-JP" sz="1100" dirty="0"/>
+            <a:endParaRPr lang="ja-JP" sz="1050" dirty="0"/>
           </a:p>
         </p:txBody>
       </p:sp>
@@ -8291,7 +8356,7 @@
           </a:xfrm>
           <a:prstGeom prst="roundRect">
             <a:avLst>
-              <a:gd name="adj" fmla="val 15625"/>
+              <a:gd name="adj" fmla="val 7813"/>
             </a:avLst>
           </a:prstGeom>
           <a:solidFill>
@@ -8300,14 +8365,14 @@
           <a:ln/>
         </p:spPr>
         <p:txBody>
-          <a:bodyPr wrap="square" lIns="0" tIns="0" rIns="0" bIns="0" rtlCol="0" anchor="ctr"/>
+          <a:bodyPr wrap="none" lIns="0" tIns="0" rIns="0" bIns="0" rtlCol="0" anchor="ctr"/>
           <a:lstStyle/>
           <a:p>
             <a:pPr algn="ctr" indent="0" marL="0">
               <a:buNone/>
             </a:pPr>
             <a:r>
-              <a:rPr lang="ja-JP" altLang="en-US" sz="1100" b="1" dirty="0">
+              <a:rPr lang="ja-JP" altLang="en-US" sz="1050" b="1" dirty="0">
                 <a:solidFill>
                   <a:srgbClr val="FFFFFF"/>
                 </a:solidFill>
@@ -8317,7 +8382,7 @@
               </a:rPr>
               <a:t>演習</a:t>
             </a:r>
-            <a:endParaRPr lang="ja-JP" sz="1100" dirty="0"/>
+            <a:endParaRPr lang="ja-JP" sz="1050" dirty="0"/>
           </a:p>
         </p:txBody>
       </p:sp>
@@ -8334,7 +8399,7 @@
           </a:xfrm>
           <a:prstGeom prst="roundRect">
             <a:avLst>
-              <a:gd name="adj" fmla="val 15625"/>
+              <a:gd name="adj" fmla="val 7813"/>
             </a:avLst>
           </a:prstGeom>
           <a:solidFill>
@@ -8343,14 +8408,14 @@
           <a:ln/>
         </p:spPr>
         <p:txBody>
-          <a:bodyPr wrap="square" lIns="0" tIns="0" rIns="0" bIns="0" rtlCol="0" anchor="ctr"/>
+          <a:bodyPr wrap="none" lIns="0" tIns="0" rIns="0" bIns="0" rtlCol="0" anchor="ctr"/>
           <a:lstStyle/>
           <a:p>
             <a:pPr algn="ctr" indent="0" marL="0">
               <a:buNone/>
             </a:pPr>
             <a:r>
-              <a:rPr lang="ja-JP" altLang="en-US" sz="1100" dirty="0">
+              <a:rPr lang="ja-JP" altLang="en-US" sz="1050" dirty="0">
                 <a:solidFill>
                   <a:srgbClr val="404040"/>
                 </a:solidFill>
@@ -8360,7 +8425,7 @@
               </a:rPr>
               <a:t>検算</a:t>
             </a:r>
-            <a:endParaRPr lang="ja-JP" sz="1100" dirty="0"/>
+            <a:endParaRPr lang="ja-JP" sz="1050" dirty="0"/>
           </a:p>
         </p:txBody>
       </p:sp>
@@ -8377,7 +8442,7 @@
           </a:xfrm>
           <a:prstGeom prst="roundRect">
             <a:avLst>
-              <a:gd name="adj" fmla="val 15625"/>
+              <a:gd name="adj" fmla="val 7813"/>
             </a:avLst>
           </a:prstGeom>
           <a:solidFill>
@@ -8386,14 +8451,14 @@
           <a:ln/>
         </p:spPr>
         <p:txBody>
-          <a:bodyPr wrap="square" lIns="0" tIns="0" rIns="0" bIns="0" rtlCol="0" anchor="ctr"/>
+          <a:bodyPr wrap="none" lIns="0" tIns="0" rIns="0" bIns="0" rtlCol="0" anchor="ctr"/>
           <a:lstStyle/>
           <a:p>
             <a:pPr algn="ctr" indent="0" marL="0">
               <a:buNone/>
             </a:pPr>
             <a:r>
-              <a:rPr lang="ja-JP" altLang="en-US" sz="1100" dirty="0">
+              <a:rPr lang="ja-JP" altLang="en-US" sz="1050" dirty="0">
                 <a:solidFill>
                   <a:srgbClr val="404040"/>
                 </a:solidFill>
@@ -8403,7 +8468,7 @@
               </a:rPr>
               <a:t>落とし穴</a:t>
             </a:r>
-            <a:endParaRPr lang="ja-JP" sz="1100" dirty="0"/>
+            <a:endParaRPr lang="ja-JP" sz="1050" dirty="0"/>
           </a:p>
         </p:txBody>
       </p:sp>
@@ -8838,7 +8903,7 @@
         </p:nvSpPr>
         <p:spPr>
           <a:xfrm>
-            <a:off x="6350508" y="2505456"/>
+            <a:off x="6350508" y="2756916"/>
             <a:ext cx="5189220" cy="502920"/>
           </a:xfrm>
           <a:prstGeom prst="rect">
@@ -8880,7 +8945,7 @@
         </p:nvSpPr>
         <p:spPr>
           <a:xfrm>
-            <a:off x="6350508" y="3223260"/>
+            <a:off x="6350508" y="3726180"/>
             <a:ext cx="5189220" cy="0"/>
           </a:xfrm>
           <a:prstGeom prst="line">
@@ -8903,7 +8968,7 @@
         </p:nvSpPr>
         <p:spPr>
           <a:xfrm>
-            <a:off x="6350508" y="3438144"/>
+            <a:off x="6350508" y="4192524"/>
             <a:ext cx="5189220" cy="502920"/>
           </a:xfrm>
           <a:prstGeom prst="rect">
@@ -8956,7 +9021,7 @@
         </p:nvSpPr>
         <p:spPr>
           <a:xfrm>
-            <a:off x="6350508" y="4155948"/>
+            <a:off x="6350508" y="5161788"/>
             <a:ext cx="5189220" cy="0"/>
           </a:xfrm>
           <a:prstGeom prst="line">
@@ -8979,7 +9044,7 @@
         </p:nvSpPr>
         <p:spPr>
           <a:xfrm>
-            <a:off x="6350508" y="4370832"/>
+            <a:off x="6350508" y="5376672"/>
             <a:ext cx="5189220" cy="502920"/>
           </a:xfrm>
           <a:prstGeom prst="rect">
@@ -8999,9 +9064,9 @@
               <a:buNone/>
             </a:pPr>
             <a:r>
-              <a:rPr lang="ja-JP" altLang="en-US" sz="2600" dirty="0">
-                <a:solidFill>
-                  <a:srgbClr val="262626"/>
+              <a:rPr lang="ja-JP" altLang="en-US" sz="2600" b="1" dirty="0">
+                <a:solidFill>
+                  <a:srgbClr val="C00000"/>
                 </a:solidFill>
                 <a:latin typeface="メイリオ" pitchFamily="34" charset="0"/>
                 <a:ea typeface="メイリオ" pitchFamily="34" charset="-122"/>
@@ -9122,7 +9187,7 @@
           </a:xfrm>
           <a:prstGeom prst="roundRect">
             <a:avLst>
-              <a:gd name="adj" fmla="val 15625"/>
+              <a:gd name="adj" fmla="val 7813"/>
             </a:avLst>
           </a:prstGeom>
           <a:solidFill>
@@ -9131,14 +9196,14 @@
           <a:ln/>
         </p:spPr>
         <p:txBody>
-          <a:bodyPr wrap="square" lIns="0" tIns="0" rIns="0" bIns="0" rtlCol="0" anchor="ctr"/>
+          <a:bodyPr wrap="none" lIns="0" tIns="0" rIns="0" bIns="0" rtlCol="0" anchor="ctr"/>
           <a:lstStyle/>
           <a:p>
             <a:pPr algn="ctr" indent="0" marL="0">
               <a:buNone/>
             </a:pPr>
             <a:r>
-              <a:rPr lang="ja-JP" altLang="en-US" sz="1100" dirty="0">
+              <a:rPr lang="ja-JP" altLang="en-US" sz="1050" dirty="0">
                 <a:solidFill>
                   <a:srgbClr val="404040"/>
                 </a:solidFill>
@@ -9148,7 +9213,7 @@
               </a:rPr>
               <a:t>定義</a:t>
             </a:r>
-            <a:endParaRPr lang="ja-JP" sz="1100" dirty="0"/>
+            <a:endParaRPr lang="ja-JP" sz="1050" dirty="0"/>
           </a:p>
         </p:txBody>
       </p:sp>
@@ -9165,7 +9230,7 @@
           </a:xfrm>
           <a:prstGeom prst="roundRect">
             <a:avLst>
-              <a:gd name="adj" fmla="val 15625"/>
+              <a:gd name="adj" fmla="val 7813"/>
             </a:avLst>
           </a:prstGeom>
           <a:solidFill>
@@ -9174,14 +9239,14 @@
           <a:ln/>
         </p:spPr>
         <p:txBody>
-          <a:bodyPr wrap="square" lIns="0" tIns="0" rIns="0" bIns="0" rtlCol="0" anchor="ctr"/>
+          <a:bodyPr wrap="none" lIns="0" tIns="0" rIns="0" bIns="0" rtlCol="0" anchor="ctr"/>
           <a:lstStyle/>
           <a:p>
             <a:pPr algn="ctr" indent="0" marL="0">
               <a:buNone/>
             </a:pPr>
             <a:r>
-              <a:rPr lang="ja-JP" altLang="en-US" sz="1100" dirty="0">
+              <a:rPr lang="ja-JP" altLang="en-US" sz="1050" dirty="0">
                 <a:solidFill>
                   <a:srgbClr val="404040"/>
                 </a:solidFill>
@@ -9191,7 +9256,7 @@
               </a:rPr>
               <a:t>式</a:t>
             </a:r>
-            <a:endParaRPr lang="ja-JP" sz="1100" dirty="0"/>
+            <a:endParaRPr lang="ja-JP" sz="1050" dirty="0"/>
           </a:p>
         </p:txBody>
       </p:sp>
@@ -9208,7 +9273,7 @@
           </a:xfrm>
           <a:prstGeom prst="roundRect">
             <a:avLst>
-              <a:gd name="adj" fmla="val 15625"/>
+              <a:gd name="adj" fmla="val 7813"/>
             </a:avLst>
           </a:prstGeom>
           <a:solidFill>
@@ -9217,14 +9282,14 @@
           <a:ln/>
         </p:spPr>
         <p:txBody>
-          <a:bodyPr wrap="square" lIns="0" tIns="0" rIns="0" bIns="0" rtlCol="0" anchor="ctr"/>
+          <a:bodyPr wrap="none" lIns="0" tIns="0" rIns="0" bIns="0" rtlCol="0" anchor="ctr"/>
           <a:lstStyle/>
           <a:p>
             <a:pPr algn="ctr" indent="0" marL="0">
               <a:buNone/>
             </a:pPr>
             <a:r>
-              <a:rPr lang="ja-JP" altLang="en-US" sz="1100" dirty="0">
+              <a:rPr lang="ja-JP" altLang="en-US" sz="1050" dirty="0">
                 <a:solidFill>
                   <a:srgbClr val="404040"/>
                 </a:solidFill>
@@ -9234,7 +9299,7 @@
               </a:rPr>
               <a:t>演習</a:t>
             </a:r>
-            <a:endParaRPr lang="ja-JP" sz="1100" dirty="0"/>
+            <a:endParaRPr lang="ja-JP" sz="1050" dirty="0"/>
           </a:p>
         </p:txBody>
       </p:sp>
@@ -9251,7 +9316,7 @@
           </a:xfrm>
           <a:prstGeom prst="roundRect">
             <a:avLst>
-              <a:gd name="adj" fmla="val 15625"/>
+              <a:gd name="adj" fmla="val 7813"/>
             </a:avLst>
           </a:prstGeom>
           <a:solidFill>
@@ -9260,14 +9325,14 @@
           <a:ln/>
         </p:spPr>
         <p:txBody>
-          <a:bodyPr wrap="square" lIns="0" tIns="0" rIns="0" bIns="0" rtlCol="0" anchor="ctr"/>
+          <a:bodyPr wrap="none" lIns="0" tIns="0" rIns="0" bIns="0" rtlCol="0" anchor="ctr"/>
           <a:lstStyle/>
           <a:p>
             <a:pPr algn="ctr" indent="0" marL="0">
               <a:buNone/>
             </a:pPr>
             <a:r>
-              <a:rPr lang="ja-JP" altLang="en-US" sz="1100" b="1" dirty="0">
+              <a:rPr lang="ja-JP" altLang="en-US" sz="1050" b="1" dirty="0">
                 <a:solidFill>
                   <a:srgbClr val="FFFFFF"/>
                 </a:solidFill>
@@ -9277,7 +9342,7 @@
               </a:rPr>
               <a:t>検算</a:t>
             </a:r>
-            <a:endParaRPr lang="ja-JP" sz="1100" dirty="0"/>
+            <a:endParaRPr lang="ja-JP" sz="1050" dirty="0"/>
           </a:p>
         </p:txBody>
       </p:sp>
@@ -9294,7 +9359,7 @@
           </a:xfrm>
           <a:prstGeom prst="roundRect">
             <a:avLst>
-              <a:gd name="adj" fmla="val 15625"/>
+              <a:gd name="adj" fmla="val 7813"/>
             </a:avLst>
           </a:prstGeom>
           <a:solidFill>
@@ -9303,14 +9368,14 @@
           <a:ln/>
         </p:spPr>
         <p:txBody>
-          <a:bodyPr wrap="square" lIns="0" tIns="0" rIns="0" bIns="0" rtlCol="0" anchor="ctr"/>
+          <a:bodyPr wrap="none" lIns="0" tIns="0" rIns="0" bIns="0" rtlCol="0" anchor="ctr"/>
           <a:lstStyle/>
           <a:p>
             <a:pPr algn="ctr" indent="0" marL="0">
               <a:buNone/>
             </a:pPr>
             <a:r>
-              <a:rPr lang="ja-JP" altLang="en-US" sz="1100" dirty="0">
+              <a:rPr lang="ja-JP" altLang="en-US" sz="1050" dirty="0">
                 <a:solidFill>
                   <a:srgbClr val="404040"/>
                 </a:solidFill>
@@ -9320,7 +9385,7 @@
               </a:rPr>
               <a:t>落とし穴</a:t>
             </a:r>
-            <a:endParaRPr lang="ja-JP" sz="1100" dirty="0"/>
+            <a:endParaRPr lang="ja-JP" sz="1050" dirty="0"/>
           </a:p>
         </p:txBody>
       </p:sp>
@@ -9411,7 +9476,7 @@
         <p:spPr>
           <a:xfrm>
             <a:off x="502920" y="1810512"/>
-            <a:ext cx="11155680" cy="2880360"/>
+            <a:ext cx="381305" cy="502920"/>
           </a:xfrm>
           <a:prstGeom prst="rect">
             <a:avLst/>
@@ -9423,12 +9488,8 @@
           <a:bodyPr wrap="square" lIns="0" tIns="0" rIns="0" bIns="0" rtlCol="0" anchor="t"/>
           <a:lstStyle/>
           <a:p>
-            <a:pPr algn="l" marL="381000" indent="-381000">
-              <a:spcAft>
-                <a:spcPts val="2200"/>
-              </a:spcAft>
-              <a:buSzPct val="100000"/>
-              <a:buChar char="•"/>
+            <a:pPr algn="l" indent="0" marL="0">
+              <a:buNone/>
             </a:pPr>
             <a:r>
               <a:rPr lang="ja-JP" altLang="en-US" sz="2600" dirty="0">
@@ -9439,17 +9500,74 @@
                 <a:ea typeface="メイリオ" pitchFamily="34" charset="-122"/>
                 <a:cs typeface="メイリオ" pitchFamily="34" charset="-120"/>
               </a:rPr>
+              <a:t>•</a:t>
+            </a:r>
+            <a:endParaRPr lang="ja-JP" sz="2600" dirty="0"/>
+          </a:p>
+        </p:txBody>
+      </p:sp>
+      <p:sp>
+        <p:nvSpPr>
+          <p:cNvPr id="12" name="Text 10"/>
+          <p:cNvSpPr txBox="1"/>
+          <p:nvPr/>
+        </p:nvSpPr>
+        <p:spPr>
+          <a:xfrm>
+            <a:off x="884225" y="1810512"/>
+            <a:ext cx="10774375" cy="502920"/>
+          </a:xfrm>
+          <a:prstGeom prst="rect">
+            <a:avLst/>
+          </a:prstGeom>
+          <a:noFill/>
+          <a:ln/>
+        </p:spPr>
+        <p:txBody>
+          <a:bodyPr wrap="square" lIns="0" tIns="0" rIns="0" bIns="0" rtlCol="0" anchor="t"/>
+          <a:lstStyle/>
+          <a:p>
+            <a:pPr algn="l" indent="0" marL="0">
+              <a:buNone/>
+            </a:pPr>
+            <a:r>
+              <a:rPr lang="ja-JP" altLang="en-US" sz="2600" dirty="0">
+                <a:solidFill>
+                  <a:srgbClr val="262626"/>
+                </a:solidFill>
+                <a:latin typeface="メイリオ" pitchFamily="34" charset="0"/>
+                <a:ea typeface="メイリオ" pitchFamily="34" charset="-122"/>
+                <a:cs typeface="メイリオ" pitchFamily="34" charset="-120"/>
+              </a:rPr>
               <a:t>答えの桁を疑う：1.5 と 15 と 150 のどれが『普通』か</a:t>
             </a:r>
             <a:endParaRPr lang="ja-JP" sz="2600" dirty="0"/>
           </a:p>
-          <a:p>
-            <a:pPr algn="l" marL="381000" indent="-381000">
-              <a:spcAft>
-                <a:spcPts val="2200"/>
-              </a:spcAft>
-              <a:buSzPct val="100000"/>
-              <a:buChar char="•"/>
+        </p:txBody>
+      </p:sp>
+      <p:sp>
+        <p:nvSpPr>
+          <p:cNvPr id="13" name="Text 11"/>
+          <p:cNvSpPr txBox="1"/>
+          <p:nvPr/>
+        </p:nvSpPr>
+        <p:spPr>
+          <a:xfrm>
+            <a:off x="502920" y="2587752"/>
+            <a:ext cx="381305" cy="502920"/>
+          </a:xfrm>
+          <a:prstGeom prst="rect">
+            <a:avLst/>
+          </a:prstGeom>
+          <a:noFill/>
+          <a:ln/>
+        </p:spPr>
+        <p:txBody>
+          <a:bodyPr wrap="square" lIns="0" tIns="0" rIns="0" bIns="0" rtlCol="0" anchor="t"/>
+          <a:lstStyle/>
+          <a:p>
+            <a:pPr algn="l" indent="0" marL="0">
+              <a:buNone/>
             </a:pPr>
             <a:r>
               <a:rPr lang="ja-JP" altLang="en-US" sz="2600" dirty="0">
@@ -9460,17 +9578,74 @@
                 <a:ea typeface="メイリオ" pitchFamily="34" charset="-122"/>
                 <a:cs typeface="メイリオ" pitchFamily="34" charset="-120"/>
               </a:rPr>
+              <a:t>•</a:t>
+            </a:r>
+            <a:endParaRPr lang="ja-JP" sz="2600" dirty="0"/>
+          </a:p>
+        </p:txBody>
+      </p:sp>
+      <p:sp>
+        <p:nvSpPr>
+          <p:cNvPr id="14" name="Text 12"/>
+          <p:cNvSpPr txBox="1"/>
+          <p:nvPr/>
+        </p:nvSpPr>
+        <p:spPr>
+          <a:xfrm>
+            <a:off x="884225" y="2587752"/>
+            <a:ext cx="10774375" cy="502920"/>
+          </a:xfrm>
+          <a:prstGeom prst="rect">
+            <a:avLst/>
+          </a:prstGeom>
+          <a:noFill/>
+          <a:ln/>
+        </p:spPr>
+        <p:txBody>
+          <a:bodyPr wrap="square" lIns="0" tIns="0" rIns="0" bIns="0" rtlCol="0" anchor="t"/>
+          <a:lstStyle/>
+          <a:p>
+            <a:pPr algn="l" indent="0" marL="0">
+              <a:buNone/>
+            </a:pPr>
+            <a:r>
+              <a:rPr lang="ja-JP" altLang="en-US" sz="2600" dirty="0">
+                <a:solidFill>
+                  <a:srgbClr val="262626"/>
+                </a:solidFill>
+                <a:latin typeface="メイリオ" pitchFamily="34" charset="0"/>
+                <a:ea typeface="メイリオ" pitchFamily="34" charset="-122"/>
+                <a:cs typeface="メイリオ" pitchFamily="34" charset="-120"/>
+              </a:rPr>
               <a:t>単位を書いて追う：μg/分 → μg/時 → mL/時</a:t>
             </a:r>
             <a:endParaRPr lang="ja-JP" sz="2600" dirty="0"/>
           </a:p>
-          <a:p>
-            <a:pPr algn="l" marL="381000" indent="-381000">
-              <a:spcAft>
-                <a:spcPts val="2200"/>
-              </a:spcAft>
-              <a:buSzPct val="100000"/>
-              <a:buChar char="•"/>
+        </p:txBody>
+      </p:sp>
+      <p:sp>
+        <p:nvSpPr>
+          <p:cNvPr id="15" name="Text 13"/>
+          <p:cNvSpPr txBox="1"/>
+          <p:nvPr/>
+        </p:nvSpPr>
+        <p:spPr>
+          <a:xfrm>
+            <a:off x="502920" y="3364992"/>
+            <a:ext cx="381305" cy="502920"/>
+          </a:xfrm>
+          <a:prstGeom prst="rect">
+            <a:avLst/>
+          </a:prstGeom>
+          <a:noFill/>
+          <a:ln/>
+        </p:spPr>
+        <p:txBody>
+          <a:bodyPr wrap="square" lIns="0" tIns="0" rIns="0" bIns="0" rtlCol="0" anchor="t"/>
+          <a:lstStyle/>
+          <a:p>
+            <a:pPr algn="l" indent="0" marL="0">
+              <a:buNone/>
             </a:pPr>
             <a:r>
               <a:rPr lang="ja-JP" altLang="en-US" sz="2600" dirty="0">
@@ -9481,6 +9656,45 @@
                 <a:ea typeface="メイリオ" pitchFamily="34" charset="-122"/>
                 <a:cs typeface="メイリオ" pitchFamily="34" charset="-120"/>
               </a:rPr>
+              <a:t>•</a:t>
+            </a:r>
+            <a:endParaRPr lang="ja-JP" sz="2600" dirty="0"/>
+          </a:p>
+        </p:txBody>
+      </p:sp>
+      <p:sp>
+        <p:nvSpPr>
+          <p:cNvPr id="16" name="Text 14"/>
+          <p:cNvSpPr txBox="1"/>
+          <p:nvPr/>
+        </p:nvSpPr>
+        <p:spPr>
+          <a:xfrm>
+            <a:off x="735178" y="3364992"/>
+            <a:ext cx="10923422" cy="502920"/>
+          </a:xfrm>
+          <a:prstGeom prst="rect">
+            <a:avLst/>
+          </a:prstGeom>
+          <a:noFill/>
+          <a:ln/>
+        </p:spPr>
+        <p:txBody>
+          <a:bodyPr wrap="square" lIns="0" tIns="0" rIns="0" bIns="0" rtlCol="0" anchor="t"/>
+          <a:lstStyle/>
+          <a:p>
+            <a:pPr algn="l" indent="0" marL="0">
+              <a:buNone/>
+            </a:pPr>
+            <a:r>
+              <a:rPr lang="ja-JP" altLang="en-US" sz="2600" dirty="0">
+                <a:solidFill>
+                  <a:srgbClr val="262626"/>
+                </a:solidFill>
+                <a:latin typeface="メイリオ" pitchFamily="34" charset="0"/>
+                <a:ea typeface="メイリオ" pitchFamily="34" charset="-122"/>
+                <a:cs typeface="メイリオ" pitchFamily="34" charset="-120"/>
+              </a:rPr>
               <a:t>『体重 × 3 mg を 50 mL に』なら </a:t>
             </a:r>
             <a:r>
@@ -9496,13 +9710,31 @@
             </a:r>
             <a:endParaRPr lang="ja-JP" sz="2600" dirty="0"/>
           </a:p>
-          <a:p>
-            <a:pPr algn="l" marL="381000" indent="-381000">
-              <a:spcAft>
-                <a:spcPts val="2200"/>
-              </a:spcAft>
-              <a:buSzPct val="100000"/>
-              <a:buChar char="•"/>
+        </p:txBody>
+      </p:sp>
+      <p:sp>
+        <p:nvSpPr>
+          <p:cNvPr id="17" name="Text 15"/>
+          <p:cNvSpPr txBox="1"/>
+          <p:nvPr/>
+        </p:nvSpPr>
+        <p:spPr>
+          <a:xfrm>
+            <a:off x="502920" y="4142232"/>
+            <a:ext cx="381305" cy="502920"/>
+          </a:xfrm>
+          <a:prstGeom prst="rect">
+            <a:avLst/>
+          </a:prstGeom>
+          <a:noFill/>
+          <a:ln/>
+        </p:spPr>
+        <p:txBody>
+          <a:bodyPr wrap="square" lIns="0" tIns="0" rIns="0" bIns="0" rtlCol="0" anchor="t"/>
+          <a:lstStyle/>
+          <a:p>
+            <a:pPr algn="l" indent="0" marL="0">
+              <a:buNone/>
             </a:pPr>
             <a:r>
               <a:rPr lang="ja-JP" altLang="en-US" sz="2600" dirty="0">
@@ -9513,6 +9745,45 @@
                 <a:ea typeface="メイリオ" pitchFamily="34" charset="-122"/>
                 <a:cs typeface="メイリオ" pitchFamily="34" charset="-120"/>
               </a:rPr>
+              <a:t>•</a:t>
+            </a:r>
+            <a:endParaRPr lang="ja-JP" sz="2600" dirty="0"/>
+          </a:p>
+        </p:txBody>
+      </p:sp>
+      <p:sp>
+        <p:nvSpPr>
+          <p:cNvPr id="18" name="Text 16"/>
+          <p:cNvSpPr txBox="1"/>
+          <p:nvPr/>
+        </p:nvSpPr>
+        <p:spPr>
+          <a:xfrm>
+            <a:off x="884225" y="4142232"/>
+            <a:ext cx="10774375" cy="502920"/>
+          </a:xfrm>
+          <a:prstGeom prst="rect">
+            <a:avLst/>
+          </a:prstGeom>
+          <a:noFill/>
+          <a:ln/>
+        </p:spPr>
+        <p:txBody>
+          <a:bodyPr wrap="square" lIns="0" tIns="0" rIns="0" bIns="0" rtlCol="0" anchor="t"/>
+          <a:lstStyle/>
+          <a:p>
+            <a:pPr algn="l" indent="0" marL="0">
+              <a:buNone/>
+            </a:pPr>
+            <a:r>
+              <a:rPr lang="ja-JP" altLang="en-US" sz="2600" dirty="0">
+                <a:solidFill>
+                  <a:srgbClr val="262626"/>
+                </a:solidFill>
+                <a:latin typeface="メイリオ" pitchFamily="34" charset="0"/>
+                <a:ea typeface="メイリオ" pitchFamily="34" charset="-122"/>
+                <a:cs typeface="メイリオ" pitchFamily="34" charset="-120"/>
+              </a:rPr>
               <a:t>院内の標準希釈表と、2 人での確認</a:t>
             </a:r>
             <a:endParaRPr lang="ja-JP" sz="2600" dirty="0"/>
@@ -9521,7 +9792,7 @@
       </p:sp>
       <p:sp>
         <p:nvSpPr>
-          <p:cNvPr id="12" name="Text 10"/>
+          <p:cNvPr id="19" name="Text 17"/>
           <p:cNvSpPr/>
           <p:nvPr/>
         </p:nvSpPr>
